--- a/05 Отчёты/Презентации/Отчёт_Развитие_NTE200_ГБЦ_QSK50.pptx
+++ b/05 Отчёты/Презентации/Отчёт_Развитие_NTE200_ГБЦ_QSK50.pptx
@@ -27839,19 +27839,19 @@
           <a:p>
             <a:pPr algn="l"/>
             <a:r>
-              <a:rPr sz="1250" b="0" i="0">
+              <a:rPr sz="1200" b="0" i="0">
                 <a:solidFill>
                   <a:srgbClr val="293136"/>
                 </a:solidFill>
                 <a:latin typeface="Calibri"/>
               </a:rPr>
-              <a:t>Топливо: 25+ паспортов, сера 2–10 мг/кг (Е5, в 2,4× ниже порога Cummins). Исключено как причина.</a:t>
-            </a:r>
-          </a:p>
-          <a:p>
-            <a:pPr algn="l"/>
-            <a:r>
-              <a:rPr sz="1250" b="0" i="0">
+              <a:t>Топливо: 25+ паспортов, сера 2–10 мг/кг (Е5, в 2,4× ниже порога Cummins). Исключено.</a:t>
+            </a:r>
+          </a:p>
+          <a:p>
+            <a:pPr algn="l"/>
+            <a:r>
+              <a:rPr sz="1200" b="0" i="0">
                 <a:solidFill>
                   <a:srgbClr val="293136"/>
                 </a:solidFill>
@@ -27863,19 +27863,19 @@
           <a:p>
             <a:pPr algn="l"/>
             <a:r>
-              <a:rPr sz="1250" b="0" i="0">
+              <a:rPr sz="1200" b="0" i="0">
                 <a:solidFill>
                   <a:srgbClr val="293136"/>
                 </a:solidFill>
                 <a:latin typeface="Calibri"/>
               </a:rPr>
-              <a:t>Масло (2024–2025): двигатели NTE200 и 730E — на одном масле Газпромнефть G-Profi MSI Plus 15W-40 (API CI-4). Не дифференцирует.</a:t>
-            </a:r>
-          </a:p>
-          <a:p>
-            <a:pPr algn="l"/>
-            <a:r>
-              <a:rPr sz="1250" b="0" i="0">
+              <a:t>Масло ДВС (2024–2026, 1583 пробы NTE200): Газпромнефть G-Profi MSI Plus + TEBOIL Super HPD Plus, оба 15W-40 CI-4. = как на 730E → не дифференцирует.</a:t>
+            </a:r>
+          </a:p>
+          <a:p>
+            <a:pPr algn="l"/>
+            <a:r>
+              <a:rPr sz="1200" b="0" i="0">
                 <a:solidFill>
                   <a:srgbClr val="293136"/>
                 </a:solidFill>
@@ -27887,13 +27887,37 @@
           <a:p>
             <a:pPr algn="l"/>
             <a:r>
-              <a:rPr sz="1250" b="0" i="0">
+              <a:rPr sz="1200" b="0" i="0">
                 <a:solidFill>
                   <a:srgbClr val="293136"/>
                 </a:solidFill>
                 <a:latin typeface="Calibri"/>
               </a:rPr>
-              <a:t>Износ Fe на NTE200: P95 = 6 ppm (730E — 20). Низкий → отказ ТЕРМИЧЕСКИЙ, а не абразивный/зольный. Версия NHL про золу ослаблена.</a:t>
+              <a:t>Состояние масла отличное: TBN 9,5 (норма ≥2,5), САЖА 0,3 (низкая), окисление 0,1, Fe P95=5.</a:t>
+            </a:r>
+          </a:p>
+          <a:p>
+            <a:pPr algn="l"/>
+            <a:r>
+              <a:rPr sz="1200" b="0" i="0">
+                <a:solidFill>
+                  <a:srgbClr val="293136"/>
+                </a:solidFill>
+                <a:latin typeface="Calibri"/>
+              </a:rPr>
+              <a:t/>
+            </a:r>
+          </a:p>
+          <a:p>
+            <a:pPr algn="l"/>
+            <a:r>
+              <a:rPr sz="1200" b="0" i="0">
+                <a:solidFill>
+                  <a:srgbClr val="293136"/>
+                </a:solidFill>
+                <a:latin typeface="Calibri"/>
+              </a:rPr>
+              <a:t>Низкая сажа ОПРОВЕРГАЕТ версию NHL про «сажа/зола → износ клапанов». Отказ ТЕРМИЧЕСКИЙ.</a:t>
             </a:r>
           </a:p>
         </p:txBody>

--- a/05 Отчёты/Презентации/Отчёт_Развитие_NTE200_ГБЦ_QSK50.pptx
+++ b/05 Отчёты/Презентации/Отчёт_Развитие_NTE200_ГБЦ_QSK50.pptx
@@ -27869,7 +27869,7 @@
                 </a:solidFill>
                 <a:latin typeface="Calibri"/>
               </a:rPr>
-              <a:t>Масло ДВС (2024–2026, 1583 пробы NTE200): Газпромнефть G-Profi MSI Plus + TEBOIL Super HPD Plus, оба 15W-40 CI-4. = как на 730E → не дифференцирует.</a:t>
+              <a:t>Масло ДВС (2024–2026, 1827 проб NTE200): Газпромнефть G-Profi MSI Plus + TEBOIL Super HPD Plus, оба 15W-40 CI-4. = как на 730E → не дифференцирует.</a:t>
             </a:r>
           </a:p>
           <a:p>
@@ -27893,7 +27893,7 @@
                 </a:solidFill>
                 <a:latin typeface="Calibri"/>
               </a:rPr>
-              <a:t>Состояние масла отличное: TBN 9,5 (норма ≥2,5), САЖА 0,3 (низкая), окисление 0,1, Fe P95=5.</a:t>
+              <a:t>Состояние масла отличное: TBN 9,7 (норма ≥2,5), САЖА 0,3 (низкая), окисление 0,1, Fe P95=6.</a:t>
             </a:r>
           </a:p>
           <a:p>

--- a/05 Отчёты/Презентации/Отчёт_Развитие_NTE200_ГБЦ_QSK50.pptx
+++ b/05 Отчёты/Презентации/Отчёт_Развитие_NTE200_ГБЦ_QSK50.pptx
@@ -23,6 +23,7 @@
     <p:sldId id="271" r:id="rId22"/>
     <p:sldId id="272" r:id="rId23"/>
     <p:sldId id="273" r:id="rId24"/>
+    <p:sldId id="274" r:id="rId25"/>
   </p:sldIdLst>
   <p:sldSz cx="12191695" cy="6858000" type="screen4x3"/>
   <p:notesSz cx="6858000" cy="9144000"/>
@@ -14002,7 +14003,7 @@
                 </a:solidFill>
                 <a:latin typeface="Calibri"/>
               </a:rPr>
-              <a:t>ПЕРЕПИСКА</a:t>
+              <a:t>СИНТЕЗ</a:t>
             </a:r>
           </a:p>
         </p:txBody>
@@ -14037,7 +14038,7 @@
                 </a:solidFill>
                 <a:latin typeface="Calibri"/>
               </a:rPr>
-              <a:t>Оценка писем NHL и Cummins</a:t>
+              <a:t>Аналитическое сравнение параметров, влияющих на отказ</a:t>
             </a:r>
           </a:p>
         </p:txBody>
@@ -14050,8 +14051,8 @@
         </p:nvSpPr>
         <p:spPr>
           <a:xfrm>
-            <a:off x="457200" y="1371600"/>
-            <a:ext cx="6201003" cy="502920"/>
+            <a:off x="365760" y="1325880"/>
+            <a:ext cx="3886200" cy="411480"/>
           </a:xfrm>
           <a:prstGeom prst="rect">
             <a:avLst/>
@@ -14094,8 +14095,8 @@
         </p:nvSpPr>
         <p:spPr>
           <a:xfrm>
-            <a:off x="512064" y="1389888"/>
-            <a:ext cx="6109563" cy="484632"/>
+            <a:off x="420624" y="1344168"/>
+            <a:ext cx="3794760" cy="393192"/>
           </a:xfrm>
           <a:prstGeom prst="rect">
             <a:avLst/>
@@ -14110,13 +14111,13 @@
           <a:p>
             <a:pPr algn="l"/>
             <a:r>
-              <a:rPr sz="1200" b="1" i="0">
+              <a:rPr sz="1100" b="1" i="0">
                 <a:solidFill>
                   <a:srgbClr val="FFFFFF"/>
                 </a:solidFill>
                 <a:latin typeface="Calibri"/>
               </a:rPr>
-              <a:t>Тезис письма</a:t>
+              <a:t>Параметр</a:t>
             </a:r>
           </a:p>
         </p:txBody>
@@ -14129,8 +14130,8 @@
         </p:nvSpPr>
         <p:spPr>
           <a:xfrm>
-            <a:off x="457200" y="1874519"/>
-            <a:ext cx="6201003" cy="502920"/>
+            <a:off x="365760" y="1737360"/>
+            <a:ext cx="3886200" cy="411480"/>
           </a:xfrm>
           <a:prstGeom prst="rect">
             <a:avLst/>
@@ -14173,8 +14174,8 @@
         </p:nvSpPr>
         <p:spPr>
           <a:xfrm>
-            <a:off x="512064" y="1892807"/>
-            <a:ext cx="6109563" cy="484632"/>
+            <a:off x="420624" y="1755648"/>
+            <a:ext cx="3794760" cy="393192"/>
           </a:xfrm>
           <a:prstGeom prst="rect">
             <a:avLst/>
@@ -14189,13 +14190,13 @@
           <a:p>
             <a:pPr algn="l"/>
             <a:r>
-              <a:rPr sz="1200" b="0" i="0">
+              <a:rPr sz="1100" b="0" i="0">
                 <a:solidFill>
                   <a:srgbClr val="293136"/>
                 </a:solidFill>
                 <a:latin typeface="Calibri"/>
               </a:rPr>
-              <a:t>NHL: износ от зольности масла (SAPS)</a:t>
+              <a:t>TIB коррекция топлива</a:t>
             </a:r>
           </a:p>
         </p:txBody>
@@ -14208,8 +14209,8 @@
         </p:nvSpPr>
         <p:spPr>
           <a:xfrm>
-            <a:off x="457200" y="2377439"/>
-            <a:ext cx="6201003" cy="502920"/>
+            <a:off x="365760" y="2148840"/>
+            <a:ext cx="3886200" cy="411480"/>
           </a:xfrm>
           <a:prstGeom prst="rect">
             <a:avLst/>
@@ -14252,8 +14253,8 @@
         </p:nvSpPr>
         <p:spPr>
           <a:xfrm>
-            <a:off x="512064" y="2395727"/>
-            <a:ext cx="6109563" cy="484632"/>
+            <a:off x="420624" y="2167128"/>
+            <a:ext cx="3794760" cy="393192"/>
           </a:xfrm>
           <a:prstGeom prst="rect">
             <a:avLst/>
@@ -14268,13 +14269,13 @@
           <a:p>
             <a:pPr algn="l"/>
             <a:r>
-              <a:rPr sz="1200" b="0" i="0">
+              <a:rPr sz="1100" b="0" i="0">
                 <a:solidFill>
                   <a:srgbClr val="293136"/>
                 </a:solidFill>
                 <a:latin typeface="Calibri"/>
               </a:rPr>
-              <a:t>NHL: пыль из карьера</a:t>
+              <a:t>Защита по T масла (derate)</a:t>
             </a:r>
           </a:p>
         </p:txBody>
@@ -14287,8 +14288,8 @@
         </p:nvSpPr>
         <p:spPr>
           <a:xfrm>
-            <a:off x="457200" y="2880359"/>
-            <a:ext cx="6201003" cy="502920"/>
+            <a:off x="365760" y="2560320"/>
+            <a:ext cx="3886200" cy="411480"/>
           </a:xfrm>
           <a:prstGeom prst="rect">
             <a:avLst/>
@@ -14331,8 +14332,8 @@
         </p:nvSpPr>
         <p:spPr>
           <a:xfrm>
-            <a:off x="512064" y="2898647"/>
-            <a:ext cx="6109563" cy="484632"/>
+            <a:off x="420624" y="2578608"/>
+            <a:ext cx="3794760" cy="393192"/>
           </a:xfrm>
           <a:prstGeom prst="rect">
             <a:avLst/>
@@ -14347,13 +14348,13 @@
           <a:p>
             <a:pPr algn="l"/>
             <a:r>
-              <a:rPr sz="1200" b="0" i="0">
+              <a:rPr sz="1100" b="0" i="0">
                 <a:solidFill>
                   <a:srgbClr val="293136"/>
                 </a:solidFill>
                 <a:latin typeface="Calibri"/>
               </a:rPr>
-              <a:t>NHL: Stellite не нужен «для rated»</a:t>
+              <a:t>Триггеры перегрева (ОЖ/наддув/топл)</a:t>
             </a:r>
           </a:p>
         </p:txBody>
@@ -14366,8 +14367,8 @@
         </p:nvSpPr>
         <p:spPr>
           <a:xfrm>
-            <a:off x="457200" y="3383279"/>
-            <a:ext cx="6201003" cy="502920"/>
+            <a:off x="365760" y="2971800"/>
+            <a:ext cx="3886200" cy="411480"/>
           </a:xfrm>
           <a:prstGeom prst="rect">
             <a:avLst/>
@@ -14410,8 +14411,8 @@
         </p:nvSpPr>
         <p:spPr>
           <a:xfrm>
-            <a:off x="512064" y="3401567"/>
-            <a:ext cx="6109563" cy="484632"/>
+            <a:off x="420624" y="2990088"/>
+            <a:ext cx="3794760" cy="393192"/>
           </a:xfrm>
           <a:prstGeom prst="rect">
             <a:avLst/>
@@ -14426,13 +14427,13 @@
           <a:p>
             <a:pPr algn="l"/>
             <a:r>
-              <a:rPr sz="1200" b="0" i="0">
+              <a:rPr sz="1100" b="0" i="0">
                 <a:solidFill>
                   <a:srgbClr val="293136"/>
                 </a:solidFill>
                 <a:latin typeface="Calibri"/>
               </a:rPr>
-              <a:t>NHL: регулировка клапанов на 1500/5000 ч</a:t>
+              <a:t>Макс. обороты, об/мин</a:t>
             </a:r>
           </a:p>
         </p:txBody>
@@ -14445,8 +14446,8 @@
         </p:nvSpPr>
         <p:spPr>
           <a:xfrm>
-            <a:off x="457200" y="3886199"/>
-            <a:ext cx="6201003" cy="502920"/>
+            <a:off x="365760" y="3383280"/>
+            <a:ext cx="3886200" cy="411480"/>
           </a:xfrm>
           <a:prstGeom prst="rect">
             <a:avLst/>
@@ -14489,8 +14490,8 @@
         </p:nvSpPr>
         <p:spPr>
           <a:xfrm>
-            <a:off x="512064" y="3904487"/>
-            <a:ext cx="6109563" cy="484632"/>
+            <a:off x="420624" y="3401568"/>
+            <a:ext cx="3794760" cy="393192"/>
           </a:xfrm>
           <a:prstGeom prst="rect">
             <a:avLst/>
@@ -14505,13 +14506,13 @@
           <a:p>
             <a:pPr algn="l"/>
             <a:r>
-              <a:rPr sz="1200" b="0" i="0">
+              <a:rPr sz="1100" b="0" i="0">
                 <a:solidFill>
                   <a:srgbClr val="293136"/>
                 </a:solidFill>
                 <a:latin typeface="Calibri"/>
               </a:rPr>
-              <a:t>Cummins: масло CES20078 достаточно</a:t>
+              <a:t>EGT пиковая (цил.), °C</a:t>
             </a:r>
           </a:p>
         </p:txBody>
@@ -14524,8 +14525,8 @@
         </p:nvSpPr>
         <p:spPr>
           <a:xfrm>
-            <a:off x="457200" y="4389119"/>
-            <a:ext cx="6201003" cy="502920"/>
+            <a:off x="365760" y="3794760"/>
+            <a:ext cx="3886200" cy="411480"/>
           </a:xfrm>
           <a:prstGeom prst="rect">
             <a:avLst/>
@@ -14568,8 +14569,8 @@
         </p:nvSpPr>
         <p:spPr>
           <a:xfrm>
-            <a:off x="512064" y="4407407"/>
-            <a:ext cx="6109563" cy="484632"/>
+            <a:off x="420624" y="3813048"/>
+            <a:ext cx="3794760" cy="393192"/>
           </a:xfrm>
           <a:prstGeom prst="rect">
             <a:avLst/>
@@ -14584,13 +14585,13 @@
           <a:p>
             <a:pPr algn="l"/>
             <a:r>
-              <a:rPr sz="1200" b="0" i="0">
+              <a:rPr sz="1100" b="0" i="0">
                 <a:solidFill>
                   <a:srgbClr val="293136"/>
                 </a:solidFill>
                 <a:latin typeface="Calibri"/>
               </a:rPr>
-              <a:t>Cummins: на NTE200 защита по T масла отключена</a:t>
+              <a:t>Наплавка Stellite клапана</a:t>
             </a:r>
           </a:p>
         </p:txBody>
@@ -14603,8 +14604,8 @@
         </p:nvSpPr>
         <p:spPr>
           <a:xfrm>
-            <a:off x="457200" y="4892039"/>
-            <a:ext cx="6201003" cy="502920"/>
+            <a:off x="365760" y="4206240"/>
+            <a:ext cx="3886200" cy="411480"/>
           </a:xfrm>
           <a:prstGeom prst="rect">
             <a:avLst/>
@@ -14647,8 +14648,8 @@
         </p:nvSpPr>
         <p:spPr>
           <a:xfrm>
-            <a:off x="512064" y="4910327"/>
-            <a:ext cx="6109563" cy="484632"/>
+            <a:off x="420624" y="4224528"/>
+            <a:ext cx="3794760" cy="393192"/>
           </a:xfrm>
           <a:prstGeom prst="rect">
             <a:avLst/>
@@ -14663,13 +14664,13 @@
           <a:p>
             <a:pPr algn="l"/>
             <a:r>
-              <a:rPr sz="1200" b="0" i="0">
+              <a:rPr sz="1100" b="0" i="0">
                 <a:solidFill>
                   <a:srgbClr val="293136"/>
                 </a:solidFill>
                 <a:latin typeface="Calibri"/>
               </a:rPr>
-              <a:t>Cummins: «не поставляет Stellite»</a:t>
+              <a:t>Нагрузка (10/10/20)</a:t>
             </a:r>
           </a:p>
         </p:txBody>
@@ -14682,8 +14683,324 @@
         </p:nvSpPr>
         <p:spPr>
           <a:xfrm>
-            <a:off x="6658203" y="1371600"/>
-            <a:ext cx="5073548" cy="502920"/>
+            <a:off x="365760" y="4617720"/>
+            <a:ext cx="3886200" cy="411480"/>
+          </a:xfrm>
+          <a:prstGeom prst="rect">
+            <a:avLst/>
+          </a:prstGeom>
+          <a:solidFill>
+            <a:srgbClr val="ECEFF1"/>
+          </a:solidFill>
+          <a:ln>
+            <a:noFill/>
+          </a:ln>
+          <a:effectLst/>
+        </p:spPr>
+        <p:style>
+          <a:lnRef idx="1">
+            <a:schemeClr val="accent1"/>
+          </a:lnRef>
+          <a:fillRef idx="3">
+            <a:schemeClr val="accent1"/>
+          </a:fillRef>
+          <a:effectRef idx="2">
+            <a:schemeClr val="accent1"/>
+          </a:effectRef>
+          <a:fontRef idx="minor">
+            <a:schemeClr val="lt1"/>
+          </a:fontRef>
+        </p:style>
+        <p:txBody>
+          <a:bodyPr rtlCol="0" anchor="ctr"/>
+          <a:lstStyle/>
+          <a:p>
+            <a:pPr algn="ctr"/>
+          </a:p>
+        </p:txBody>
+      </p:sp>
+      <p:sp>
+        <p:nvSpPr>
+          <p:cNvPr id="25" name="TextBox 24"/>
+          <p:cNvSpPr txBox="1"/>
+          <p:nvPr/>
+        </p:nvSpPr>
+        <p:spPr>
+          <a:xfrm>
+            <a:off x="420624" y="4636008"/>
+            <a:ext cx="3794760" cy="393192"/>
+          </a:xfrm>
+          <a:prstGeom prst="rect">
+            <a:avLst/>
+          </a:prstGeom>
+          <a:noFill/>
+        </p:spPr>
+        <p:txBody>
+          <a:bodyPr wrap="square" anchor="ctr">
+            <a:spAutoFit/>
+          </a:bodyPr>
+          <a:lstStyle/>
+          <a:p>
+            <a:pPr algn="l"/>
+            <a:r>
+              <a:rPr sz="1100" b="0" i="0">
+                <a:solidFill>
+                  <a:srgbClr val="293136"/>
+                </a:solidFill>
+                <a:latin typeface="Calibri"/>
+              </a:rPr>
+              <a:t>Масло: марка / класс</a:t>
+            </a:r>
+          </a:p>
+        </p:txBody>
+      </p:sp>
+      <p:sp>
+        <p:nvSpPr>
+          <p:cNvPr id="26" name="Rectangle 25"/>
+          <p:cNvSpPr/>
+          <p:nvPr/>
+        </p:nvSpPr>
+        <p:spPr>
+          <a:xfrm>
+            <a:off x="365760" y="5029200"/>
+            <a:ext cx="3886200" cy="411480"/>
+          </a:xfrm>
+          <a:prstGeom prst="rect">
+            <a:avLst/>
+          </a:prstGeom>
+          <a:solidFill>
+            <a:srgbClr val="FFFFFF"/>
+          </a:solidFill>
+          <a:ln>
+            <a:noFill/>
+          </a:ln>
+          <a:effectLst/>
+        </p:spPr>
+        <p:style>
+          <a:lnRef idx="1">
+            <a:schemeClr val="accent1"/>
+          </a:lnRef>
+          <a:fillRef idx="3">
+            <a:schemeClr val="accent1"/>
+          </a:fillRef>
+          <a:effectRef idx="2">
+            <a:schemeClr val="accent1"/>
+          </a:effectRef>
+          <a:fontRef idx="minor">
+            <a:schemeClr val="lt1"/>
+          </a:fontRef>
+        </p:style>
+        <p:txBody>
+          <a:bodyPr rtlCol="0" anchor="ctr"/>
+          <a:lstStyle/>
+          <a:p>
+            <a:pPr algn="ctr"/>
+          </a:p>
+        </p:txBody>
+      </p:sp>
+      <p:sp>
+        <p:nvSpPr>
+          <p:cNvPr id="27" name="TextBox 26"/>
+          <p:cNvSpPr txBox="1"/>
+          <p:nvPr/>
+        </p:nvSpPr>
+        <p:spPr>
+          <a:xfrm>
+            <a:off x="420624" y="5047488"/>
+            <a:ext cx="3794760" cy="393192"/>
+          </a:xfrm>
+          <a:prstGeom prst="rect">
+            <a:avLst/>
+          </a:prstGeom>
+          <a:noFill/>
+        </p:spPr>
+        <p:txBody>
+          <a:bodyPr wrap="square" anchor="ctr">
+            <a:spAutoFit/>
+          </a:bodyPr>
+          <a:lstStyle/>
+          <a:p>
+            <a:pPr algn="l"/>
+            <a:r>
+              <a:rPr sz="1100" b="0" i="0">
+                <a:solidFill>
+                  <a:srgbClr val="293136"/>
+                </a:solidFill>
+                <a:latin typeface="Calibri"/>
+              </a:rPr>
+              <a:t>Сажа в масле (ST)</a:t>
+            </a:r>
+          </a:p>
+        </p:txBody>
+      </p:sp>
+      <p:sp>
+        <p:nvSpPr>
+          <p:cNvPr id="28" name="Rectangle 27"/>
+          <p:cNvSpPr/>
+          <p:nvPr/>
+        </p:nvSpPr>
+        <p:spPr>
+          <a:xfrm>
+            <a:off x="365760" y="5440680"/>
+            <a:ext cx="3886200" cy="411480"/>
+          </a:xfrm>
+          <a:prstGeom prst="rect">
+            <a:avLst/>
+          </a:prstGeom>
+          <a:solidFill>
+            <a:srgbClr val="ECEFF1"/>
+          </a:solidFill>
+          <a:ln>
+            <a:noFill/>
+          </a:ln>
+          <a:effectLst/>
+        </p:spPr>
+        <p:style>
+          <a:lnRef idx="1">
+            <a:schemeClr val="accent1"/>
+          </a:lnRef>
+          <a:fillRef idx="3">
+            <a:schemeClr val="accent1"/>
+          </a:fillRef>
+          <a:effectRef idx="2">
+            <a:schemeClr val="accent1"/>
+          </a:effectRef>
+          <a:fontRef idx="minor">
+            <a:schemeClr val="lt1"/>
+          </a:fontRef>
+        </p:style>
+        <p:txBody>
+          <a:bodyPr rtlCol="0" anchor="ctr"/>
+          <a:lstStyle/>
+          <a:p>
+            <a:pPr algn="ctr"/>
+          </a:p>
+        </p:txBody>
+      </p:sp>
+      <p:sp>
+        <p:nvSpPr>
+          <p:cNvPr id="29" name="TextBox 28"/>
+          <p:cNvSpPr txBox="1"/>
+          <p:nvPr/>
+        </p:nvSpPr>
+        <p:spPr>
+          <a:xfrm>
+            <a:off x="420624" y="5458968"/>
+            <a:ext cx="3794760" cy="393192"/>
+          </a:xfrm>
+          <a:prstGeom prst="rect">
+            <a:avLst/>
+          </a:prstGeom>
+          <a:noFill/>
+        </p:spPr>
+        <p:txBody>
+          <a:bodyPr wrap="square" anchor="ctr">
+            <a:spAutoFit/>
+          </a:bodyPr>
+          <a:lstStyle/>
+          <a:p>
+            <a:pPr algn="l"/>
+            <a:r>
+              <a:rPr sz="1100" b="0" i="0">
+                <a:solidFill>
+                  <a:srgbClr val="293136"/>
+                </a:solidFill>
+                <a:latin typeface="Calibri"/>
+              </a:rPr>
+              <a:t>TBN / износ Fe P95</a:t>
+            </a:r>
+          </a:p>
+        </p:txBody>
+      </p:sp>
+      <p:sp>
+        <p:nvSpPr>
+          <p:cNvPr id="30" name="Rectangle 29"/>
+          <p:cNvSpPr/>
+          <p:nvPr/>
+        </p:nvSpPr>
+        <p:spPr>
+          <a:xfrm>
+            <a:off x="365760" y="5852160"/>
+            <a:ext cx="3886200" cy="411480"/>
+          </a:xfrm>
+          <a:prstGeom prst="rect">
+            <a:avLst/>
+          </a:prstGeom>
+          <a:solidFill>
+            <a:srgbClr val="FFFFFF"/>
+          </a:solidFill>
+          <a:ln>
+            <a:noFill/>
+          </a:ln>
+          <a:effectLst/>
+        </p:spPr>
+        <p:style>
+          <a:lnRef idx="1">
+            <a:schemeClr val="accent1"/>
+          </a:lnRef>
+          <a:fillRef idx="3">
+            <a:schemeClr val="accent1"/>
+          </a:fillRef>
+          <a:effectRef idx="2">
+            <a:schemeClr val="accent1"/>
+          </a:effectRef>
+          <a:fontRef idx="minor">
+            <a:schemeClr val="lt1"/>
+          </a:fontRef>
+        </p:style>
+        <p:txBody>
+          <a:bodyPr rtlCol="0" anchor="ctr"/>
+          <a:lstStyle/>
+          <a:p>
+            <a:pPr algn="ctr"/>
+          </a:p>
+        </p:txBody>
+      </p:sp>
+      <p:sp>
+        <p:nvSpPr>
+          <p:cNvPr id="31" name="TextBox 30"/>
+          <p:cNvSpPr txBox="1"/>
+          <p:nvPr/>
+        </p:nvSpPr>
+        <p:spPr>
+          <a:xfrm>
+            <a:off x="420624" y="5870448"/>
+            <a:ext cx="3794760" cy="393192"/>
+          </a:xfrm>
+          <a:prstGeom prst="rect">
+            <a:avLst/>
+          </a:prstGeom>
+          <a:noFill/>
+        </p:spPr>
+        <p:txBody>
+          <a:bodyPr wrap="square" anchor="ctr">
+            <a:spAutoFit/>
+          </a:bodyPr>
+          <a:lstStyle/>
+          <a:p>
+            <a:pPr algn="l"/>
+            <a:r>
+              <a:rPr sz="1100" b="0" i="0">
+                <a:solidFill>
+                  <a:srgbClr val="293136"/>
+                </a:solidFill>
+                <a:latin typeface="Calibri"/>
+              </a:rPr>
+              <a:t>Топливо (сера), мг/кг</a:t>
+            </a:r>
+          </a:p>
+        </p:txBody>
+      </p:sp>
+      <p:sp>
+        <p:nvSpPr>
+          <p:cNvPr id="32" name="Rectangle 31"/>
+          <p:cNvSpPr/>
+          <p:nvPr/>
+        </p:nvSpPr>
+        <p:spPr>
+          <a:xfrm>
+            <a:off x="4251960" y="1325880"/>
+            <a:ext cx="2057400" cy="411480"/>
           </a:xfrm>
           <a:prstGeom prst="rect">
             <a:avLst/>
@@ -14720,14 +15037,14 @@
       </p:sp>
       <p:sp>
         <p:nvSpPr>
-          <p:cNvPr id="25" name="TextBox 24"/>
-          <p:cNvSpPr txBox="1"/>
-          <p:nvPr/>
-        </p:nvSpPr>
-        <p:spPr>
-          <a:xfrm>
-            <a:off x="6713067" y="1389888"/>
-            <a:ext cx="4982108" cy="484632"/>
+          <p:cNvPr id="33" name="TextBox 32"/>
+          <p:cNvSpPr txBox="1"/>
+          <p:nvPr/>
+        </p:nvSpPr>
+        <p:spPr>
+          <a:xfrm>
+            <a:off x="4306824" y="1344168"/>
+            <a:ext cx="1965960" cy="393192"/>
           </a:xfrm>
           <a:prstGeom prst="rect">
             <a:avLst/>
@@ -14742,27 +15059,27 @@
           <a:p>
             <a:pPr algn="l"/>
             <a:r>
-              <a:rPr sz="1200" b="1" i="0">
+              <a:rPr sz="1100" b="1" i="0">
                 <a:solidFill>
                   <a:srgbClr val="FFFFFF"/>
                 </a:solidFill>
                 <a:latin typeface="Calibri"/>
               </a:rPr>
-              <a:t>Вердикт</a:t>
-            </a:r>
-          </a:p>
-        </p:txBody>
-      </p:sp>
-      <p:sp>
-        <p:nvSpPr>
-          <p:cNvPr id="26" name="Rectangle 25"/>
-          <p:cNvSpPr/>
-          <p:nvPr/>
-        </p:nvSpPr>
-        <p:spPr>
-          <a:xfrm>
-            <a:off x="6658203" y="1874519"/>
-            <a:ext cx="5073548" cy="502920"/>
+              <a:t>NTE200</a:t>
+            </a:r>
+          </a:p>
+        </p:txBody>
+      </p:sp>
+      <p:sp>
+        <p:nvSpPr>
+          <p:cNvPr id="34" name="Rectangle 33"/>
+          <p:cNvSpPr/>
+          <p:nvPr/>
+        </p:nvSpPr>
+        <p:spPr>
+          <a:xfrm>
+            <a:off x="4251960" y="1737360"/>
+            <a:ext cx="2057400" cy="411480"/>
           </a:xfrm>
           <a:prstGeom prst="rect">
             <a:avLst/>
@@ -14799,14 +15116,14 @@
       </p:sp>
       <p:sp>
         <p:nvSpPr>
-          <p:cNvPr id="27" name="TextBox 26"/>
-          <p:cNvSpPr txBox="1"/>
-          <p:nvPr/>
-        </p:nvSpPr>
-        <p:spPr>
-          <a:xfrm>
-            <a:off x="6713067" y="1892807"/>
-            <a:ext cx="4982108" cy="484632"/>
+          <p:cNvPr id="35" name="TextBox 34"/>
+          <p:cNvSpPr txBox="1"/>
+          <p:nvPr/>
+        </p:nvSpPr>
+        <p:spPr>
+          <a:xfrm>
+            <a:off x="4306824" y="1755648"/>
+            <a:ext cx="1965960" cy="393192"/>
           </a:xfrm>
           <a:prstGeom prst="rect">
             <a:avLst/>
@@ -14821,27 +15138,27 @@
           <a:p>
             <a:pPr algn="l"/>
             <a:r>
-              <a:rPr sz="1200" b="0" i="0">
+              <a:rPr sz="1100" b="0" i="0">
                 <a:solidFill>
                   <a:srgbClr val="293136"/>
                 </a:solidFill>
                 <a:latin typeface="Calibri"/>
               </a:rPr>
-              <a:t>❌ смещает на эксплуатацию (низкий Fe)</a:t>
-            </a:r>
-          </a:p>
-        </p:txBody>
-      </p:sp>
-      <p:sp>
-        <p:nvSpPr>
-          <p:cNvPr id="28" name="Rectangle 27"/>
-          <p:cNvSpPr/>
-          <p:nvPr/>
-        </p:nvSpPr>
-        <p:spPr>
-          <a:xfrm>
-            <a:off x="6658203" y="2377439"/>
-            <a:ext cx="5073548" cy="502920"/>
+              <a:t>200%</a:t>
+            </a:r>
+          </a:p>
+        </p:txBody>
+      </p:sp>
+      <p:sp>
+        <p:nvSpPr>
+          <p:cNvPr id="36" name="Rectangle 35"/>
+          <p:cNvSpPr/>
+          <p:nvPr/>
+        </p:nvSpPr>
+        <p:spPr>
+          <a:xfrm>
+            <a:off x="4251960" y="2148840"/>
+            <a:ext cx="2057400" cy="411480"/>
           </a:xfrm>
           <a:prstGeom prst="rect">
             <a:avLst/>
@@ -14878,14 +15195,14 @@
       </p:sp>
       <p:sp>
         <p:nvSpPr>
-          <p:cNvPr id="29" name="TextBox 28"/>
-          <p:cNvSpPr txBox="1"/>
-          <p:nvPr/>
-        </p:nvSpPr>
-        <p:spPr>
-          <a:xfrm>
-            <a:off x="6713067" y="2395727"/>
-            <a:ext cx="4982108" cy="484632"/>
+          <p:cNvPr id="37" name="TextBox 36"/>
+          <p:cNvSpPr txBox="1"/>
+          <p:nvPr/>
+        </p:nvSpPr>
+        <p:spPr>
+          <a:xfrm>
+            <a:off x="4306824" y="2167128"/>
+            <a:ext cx="1965960" cy="393192"/>
           </a:xfrm>
           <a:prstGeom prst="rect">
             <a:avLst/>
@@ -14900,27 +15217,27 @@
           <a:p>
             <a:pPr algn="l"/>
             <a:r>
-              <a:rPr sz="1200" b="0" i="0">
+              <a:rPr sz="1100" b="0" i="0">
                 <a:solidFill>
                   <a:srgbClr val="293136"/>
                 </a:solidFill>
                 <a:latin typeface="Calibri"/>
               </a:rPr>
-              <a:t>❌ переоценка (Si подчинён)</a:t>
-            </a:r>
-          </a:p>
-        </p:txBody>
-      </p:sp>
-      <p:sp>
-        <p:nvSpPr>
-          <p:cNvPr id="30" name="Rectangle 29"/>
-          <p:cNvSpPr/>
-          <p:nvPr/>
-        </p:nvSpPr>
-        <p:spPr>
-          <a:xfrm>
-            <a:off x="6658203" y="2880359"/>
-            <a:ext cx="5073548" cy="502920"/>
+              <a:t>ВЫКЛ</a:t>
+            </a:r>
+          </a:p>
+        </p:txBody>
+      </p:sp>
+      <p:sp>
+        <p:nvSpPr>
+          <p:cNvPr id="38" name="Rectangle 37"/>
+          <p:cNvSpPr/>
+          <p:nvPr/>
+        </p:nvSpPr>
+        <p:spPr>
+          <a:xfrm>
+            <a:off x="4251960" y="2560320"/>
+            <a:ext cx="2057400" cy="411480"/>
           </a:xfrm>
           <a:prstGeom prst="rect">
             <a:avLst/>
@@ -14957,14 +15274,14 @@
       </p:sp>
       <p:sp>
         <p:nvSpPr>
-          <p:cNvPr id="31" name="TextBox 30"/>
-          <p:cNvSpPr txBox="1"/>
-          <p:nvPr/>
-        </p:nvSpPr>
-        <p:spPr>
-          <a:xfrm>
-            <a:off x="6713067" y="2898647"/>
-            <a:ext cx="4982108" cy="484632"/>
+          <p:cNvPr id="39" name="TextBox 38"/>
+          <p:cNvSpPr txBox="1"/>
+          <p:nvPr/>
+        </p:nvSpPr>
+        <p:spPr>
+          <a:xfrm>
+            <a:off x="4306824" y="2578608"/>
+            <a:ext cx="1965960" cy="393192"/>
           </a:xfrm>
           <a:prstGeom prst="rect">
             <a:avLst/>
@@ -14979,27 +15296,27 @@
           <a:p>
             <a:pPr algn="l"/>
             <a:r>
-              <a:rPr sz="1200" b="0" i="0">
+              <a:rPr sz="1100" b="0" i="0">
                 <a:solidFill>
                   <a:srgbClr val="293136"/>
                 </a:solidFill>
                 <a:latin typeface="Calibri"/>
               </a:rPr>
-              <a:t>❌ ложный (NTE200 ≠ rated: 567 °C)</a:t>
-            </a:r>
-          </a:p>
-        </p:txBody>
-      </p:sp>
-      <p:sp>
-        <p:nvSpPr>
-          <p:cNvPr id="32" name="Rectangle 31"/>
-          <p:cNvSpPr/>
-          <p:nvPr/>
-        </p:nvSpPr>
-        <p:spPr>
-          <a:xfrm>
-            <a:off x="6658203" y="3383279"/>
-            <a:ext cx="5073548" cy="502920"/>
+              <a:t>ВЫКЛ</a:t>
+            </a:r>
+          </a:p>
+        </p:txBody>
+      </p:sp>
+      <p:sp>
+        <p:nvSpPr>
+          <p:cNvPr id="40" name="Rectangle 39"/>
+          <p:cNvSpPr/>
+          <p:nvPr/>
+        </p:nvSpPr>
+        <p:spPr>
+          <a:xfrm>
+            <a:off x="4251960" y="2971800"/>
+            <a:ext cx="2057400" cy="411480"/>
           </a:xfrm>
           <a:prstGeom prst="rect">
             <a:avLst/>
@@ -15036,14 +15353,14 @@
       </p:sp>
       <p:sp>
         <p:nvSpPr>
-          <p:cNvPr id="33" name="TextBox 32"/>
-          <p:cNvSpPr txBox="1"/>
-          <p:nvPr/>
-        </p:nvSpPr>
-        <p:spPr>
-          <a:xfrm>
-            <a:off x="6713067" y="3401567"/>
-            <a:ext cx="4982108" cy="484632"/>
+          <p:cNvPr id="41" name="TextBox 40"/>
+          <p:cNvSpPr txBox="1"/>
+          <p:nvPr/>
+        </p:nvSpPr>
+        <p:spPr>
+          <a:xfrm>
+            <a:off x="4306824" y="2990088"/>
+            <a:ext cx="1965960" cy="393192"/>
           </a:xfrm>
           <a:prstGeom prst="rect">
             <a:avLst/>
@@ -15058,27 +15375,27 @@
           <a:p>
             <a:pPr algn="l"/>
             <a:r>
-              <a:rPr sz="1200" b="0" i="0">
+              <a:rPr sz="1100" b="0" i="0">
                 <a:solidFill>
                   <a:srgbClr val="293136"/>
                 </a:solidFill>
                 <a:latin typeface="Calibri"/>
               </a:rPr>
-              <a:t>⚠️ косвенное признание проблемы</a:t>
-            </a:r>
-          </a:p>
-        </p:txBody>
-      </p:sp>
-      <p:sp>
-        <p:nvSpPr>
-          <p:cNvPr id="34" name="Rectangle 33"/>
-          <p:cNvSpPr/>
-          <p:nvPr/>
-        </p:nvSpPr>
-        <p:spPr>
-          <a:xfrm>
-            <a:off x="6658203" y="3886199"/>
-            <a:ext cx="5073548" cy="502920"/>
+              <a:t>2100</a:t>
+            </a:r>
+          </a:p>
+        </p:txBody>
+      </p:sp>
+      <p:sp>
+        <p:nvSpPr>
+          <p:cNvPr id="42" name="Rectangle 41"/>
+          <p:cNvSpPr/>
+          <p:nvPr/>
+        </p:nvSpPr>
+        <p:spPr>
+          <a:xfrm>
+            <a:off x="4251960" y="3383280"/>
+            <a:ext cx="2057400" cy="411480"/>
           </a:xfrm>
           <a:prstGeom prst="rect">
             <a:avLst/>
@@ -15115,14 +15432,14 @@
       </p:sp>
       <p:sp>
         <p:nvSpPr>
-          <p:cNvPr id="35" name="TextBox 34"/>
-          <p:cNvSpPr txBox="1"/>
-          <p:nvPr/>
-        </p:nvSpPr>
-        <p:spPr>
-          <a:xfrm>
-            <a:off x="6713067" y="3904487"/>
-            <a:ext cx="4982108" cy="484632"/>
+          <p:cNvPr id="43" name="TextBox 42"/>
+          <p:cNvSpPr txBox="1"/>
+          <p:nvPr/>
+        </p:nvSpPr>
+        <p:spPr>
+          <a:xfrm>
+            <a:off x="4306824" y="3401568"/>
+            <a:ext cx="1965960" cy="393192"/>
           </a:xfrm>
           <a:prstGeom prst="rect">
             <a:avLst/>
@@ -15137,27 +15454,27 @@
           <a:p>
             <a:pPr algn="l"/>
             <a:r>
-              <a:rPr sz="1200" b="0" i="0">
+              <a:rPr sz="1100" b="0" i="0">
                 <a:solidFill>
                   <a:srgbClr val="293136"/>
                 </a:solidFill>
                 <a:latin typeface="Calibri"/>
               </a:rPr>
-              <a:t>❌ уход от корня</a:t>
-            </a:r>
-          </a:p>
-        </p:txBody>
-      </p:sp>
-      <p:sp>
-        <p:nvSpPr>
-          <p:cNvPr id="36" name="Rectangle 35"/>
-          <p:cNvSpPr/>
-          <p:nvPr/>
-        </p:nvSpPr>
-        <p:spPr>
-          <a:xfrm>
-            <a:off x="6658203" y="4389119"/>
-            <a:ext cx="5073548" cy="502920"/>
+              <a:t>567</a:t>
+            </a:r>
+          </a:p>
+        </p:txBody>
+      </p:sp>
+      <p:sp>
+        <p:nvSpPr>
+          <p:cNvPr id="44" name="Rectangle 43"/>
+          <p:cNvSpPr/>
+          <p:nvPr/>
+        </p:nvSpPr>
+        <p:spPr>
+          <a:xfrm>
+            <a:off x="4251960" y="3794760"/>
+            <a:ext cx="2057400" cy="411480"/>
           </a:xfrm>
           <a:prstGeom prst="rect">
             <a:avLst/>
@@ -15194,14 +15511,14 @@
       </p:sp>
       <p:sp>
         <p:nvSpPr>
-          <p:cNvPr id="37" name="TextBox 36"/>
-          <p:cNvSpPr txBox="1"/>
-          <p:nvPr/>
-        </p:nvSpPr>
-        <p:spPr>
-          <a:xfrm>
-            <a:off x="6713067" y="4407407"/>
-            <a:ext cx="4982108" cy="484632"/>
+          <p:cNvPr id="45" name="TextBox 44"/>
+          <p:cNvSpPr txBox="1"/>
+          <p:nvPr/>
+        </p:nvSpPr>
+        <p:spPr>
+          <a:xfrm>
+            <a:off x="4306824" y="3813048"/>
+            <a:ext cx="1965960" cy="393192"/>
           </a:xfrm>
           <a:prstGeom prst="rect">
             <a:avLst/>
@@ -15216,27 +15533,27 @@
           <a:p>
             <a:pPr algn="l"/>
             <a:r>
-              <a:rPr sz="1200" b="0" i="0">
+              <a:rPr sz="1100" b="0" i="0">
                 <a:solidFill>
                   <a:srgbClr val="293136"/>
                 </a:solidFill>
                 <a:latin typeface="Calibri"/>
               </a:rPr>
-              <a:t>✅ ПОДТВЕРЖДАЕТ нашу находку</a:t>
-            </a:r>
-          </a:p>
-        </p:txBody>
-      </p:sp>
-      <p:sp>
-        <p:nvSpPr>
-          <p:cNvPr id="38" name="Rectangle 37"/>
-          <p:cNvSpPr/>
-          <p:nvPr/>
-        </p:nvSpPr>
-        <p:spPr>
-          <a:xfrm>
-            <a:off x="6658203" y="4892039"/>
-            <a:ext cx="5073548" cy="502920"/>
+              <a:t>нет</a:t>
+            </a:r>
+          </a:p>
+        </p:txBody>
+      </p:sp>
+      <p:sp>
+        <p:nvSpPr>
+          <p:cNvPr id="46" name="Rectangle 45"/>
+          <p:cNvSpPr/>
+          <p:nvPr/>
+        </p:nvSpPr>
+        <p:spPr>
+          <a:xfrm>
+            <a:off x="4251960" y="4206240"/>
+            <a:ext cx="2057400" cy="411480"/>
           </a:xfrm>
           <a:prstGeom prst="rect">
             <a:avLst/>
@@ -15273,14 +15590,14 @@
       </p:sp>
       <p:sp>
         <p:nvSpPr>
-          <p:cNvPr id="39" name="TextBox 38"/>
-          <p:cNvSpPr txBox="1"/>
-          <p:nvPr/>
-        </p:nvSpPr>
-        <p:spPr>
-          <a:xfrm>
-            <a:off x="6713067" y="4910327"/>
-            <a:ext cx="4982108" cy="484632"/>
+          <p:cNvPr id="47" name="TextBox 46"/>
+          <p:cNvSpPr txBox="1"/>
+          <p:nvPr/>
+        </p:nvSpPr>
+        <p:spPr>
+          <a:xfrm>
+            <a:off x="4306824" y="4224528"/>
+            <a:ext cx="1965960" cy="393192"/>
           </a:xfrm>
           <a:prstGeom prst="rect">
             <a:avLst/>
@@ -15295,20 +15612,2267 @@
           <a:p>
             <a:pPr algn="l"/>
             <a:r>
-              <a:rPr sz="1200" b="0" i="0">
+              <a:rPr sz="1100" b="0" i="0">
                 <a:solidFill>
                   <a:srgbClr val="293136"/>
                 </a:solidFill>
                 <a:latin typeface="Calibri"/>
               </a:rPr>
-              <a:t>❌ уход от ответственности</a:t>
-            </a:r>
-          </a:p>
-        </p:txBody>
-      </p:sp>
-      <p:sp>
-        <p:nvSpPr>
-          <p:cNvPr id="40" name="Rectangle 39"/>
+              <a:t>соблюд.</a:t>
+            </a:r>
+          </a:p>
+        </p:txBody>
+      </p:sp>
+      <p:sp>
+        <p:nvSpPr>
+          <p:cNvPr id="48" name="Rectangle 47"/>
+          <p:cNvSpPr/>
+          <p:nvPr/>
+        </p:nvSpPr>
+        <p:spPr>
+          <a:xfrm>
+            <a:off x="4251960" y="4617720"/>
+            <a:ext cx="2057400" cy="411480"/>
+          </a:xfrm>
+          <a:prstGeom prst="rect">
+            <a:avLst/>
+          </a:prstGeom>
+          <a:solidFill>
+            <a:srgbClr val="ECEFF1"/>
+          </a:solidFill>
+          <a:ln>
+            <a:noFill/>
+          </a:ln>
+          <a:effectLst/>
+        </p:spPr>
+        <p:style>
+          <a:lnRef idx="1">
+            <a:schemeClr val="accent1"/>
+          </a:lnRef>
+          <a:fillRef idx="3">
+            <a:schemeClr val="accent1"/>
+          </a:fillRef>
+          <a:effectRef idx="2">
+            <a:schemeClr val="accent1"/>
+          </a:effectRef>
+          <a:fontRef idx="minor">
+            <a:schemeClr val="lt1"/>
+          </a:fontRef>
+        </p:style>
+        <p:txBody>
+          <a:bodyPr rtlCol="0" anchor="ctr"/>
+          <a:lstStyle/>
+          <a:p>
+            <a:pPr algn="ctr"/>
+          </a:p>
+        </p:txBody>
+      </p:sp>
+      <p:sp>
+        <p:nvSpPr>
+          <p:cNvPr id="49" name="TextBox 48"/>
+          <p:cNvSpPr txBox="1"/>
+          <p:nvPr/>
+        </p:nvSpPr>
+        <p:spPr>
+          <a:xfrm>
+            <a:off x="4306824" y="4636008"/>
+            <a:ext cx="1965960" cy="393192"/>
+          </a:xfrm>
+          <a:prstGeom prst="rect">
+            <a:avLst/>
+          </a:prstGeom>
+          <a:noFill/>
+        </p:spPr>
+        <p:txBody>
+          <a:bodyPr wrap="square" anchor="ctr">
+            <a:spAutoFit/>
+          </a:bodyPr>
+          <a:lstStyle/>
+          <a:p>
+            <a:pPr algn="l"/>
+            <a:r>
+              <a:rPr sz="1100" b="0" i="0">
+                <a:solidFill>
+                  <a:srgbClr val="293136"/>
+                </a:solidFill>
+                <a:latin typeface="Calibri"/>
+              </a:rPr>
+              <a:t>15W-40 CI-4</a:t>
+            </a:r>
+          </a:p>
+        </p:txBody>
+      </p:sp>
+      <p:sp>
+        <p:nvSpPr>
+          <p:cNvPr id="50" name="Rectangle 49"/>
+          <p:cNvSpPr/>
+          <p:nvPr/>
+        </p:nvSpPr>
+        <p:spPr>
+          <a:xfrm>
+            <a:off x="4251960" y="5029200"/>
+            <a:ext cx="2057400" cy="411480"/>
+          </a:xfrm>
+          <a:prstGeom prst="rect">
+            <a:avLst/>
+          </a:prstGeom>
+          <a:solidFill>
+            <a:srgbClr val="FFFFFF"/>
+          </a:solidFill>
+          <a:ln>
+            <a:noFill/>
+          </a:ln>
+          <a:effectLst/>
+        </p:spPr>
+        <p:style>
+          <a:lnRef idx="1">
+            <a:schemeClr val="accent1"/>
+          </a:lnRef>
+          <a:fillRef idx="3">
+            <a:schemeClr val="accent1"/>
+          </a:fillRef>
+          <a:effectRef idx="2">
+            <a:schemeClr val="accent1"/>
+          </a:effectRef>
+          <a:fontRef idx="minor">
+            <a:schemeClr val="lt1"/>
+          </a:fontRef>
+        </p:style>
+        <p:txBody>
+          <a:bodyPr rtlCol="0" anchor="ctr"/>
+          <a:lstStyle/>
+          <a:p>
+            <a:pPr algn="ctr"/>
+          </a:p>
+        </p:txBody>
+      </p:sp>
+      <p:sp>
+        <p:nvSpPr>
+          <p:cNvPr id="51" name="TextBox 50"/>
+          <p:cNvSpPr txBox="1"/>
+          <p:nvPr/>
+        </p:nvSpPr>
+        <p:spPr>
+          <a:xfrm>
+            <a:off x="4306824" y="5047488"/>
+            <a:ext cx="1965960" cy="393192"/>
+          </a:xfrm>
+          <a:prstGeom prst="rect">
+            <a:avLst/>
+          </a:prstGeom>
+          <a:noFill/>
+        </p:spPr>
+        <p:txBody>
+          <a:bodyPr wrap="square" anchor="ctr">
+            <a:spAutoFit/>
+          </a:bodyPr>
+          <a:lstStyle/>
+          <a:p>
+            <a:pPr algn="l"/>
+            <a:r>
+              <a:rPr sz="1100" b="0" i="0">
+                <a:solidFill>
+                  <a:srgbClr val="293136"/>
+                </a:solidFill>
+                <a:latin typeface="Calibri"/>
+              </a:rPr>
+              <a:t>0,3</a:t>
+            </a:r>
+          </a:p>
+        </p:txBody>
+      </p:sp>
+      <p:sp>
+        <p:nvSpPr>
+          <p:cNvPr id="52" name="Rectangle 51"/>
+          <p:cNvSpPr/>
+          <p:nvPr/>
+        </p:nvSpPr>
+        <p:spPr>
+          <a:xfrm>
+            <a:off x="4251960" y="5440680"/>
+            <a:ext cx="2057400" cy="411480"/>
+          </a:xfrm>
+          <a:prstGeom prst="rect">
+            <a:avLst/>
+          </a:prstGeom>
+          <a:solidFill>
+            <a:srgbClr val="ECEFF1"/>
+          </a:solidFill>
+          <a:ln>
+            <a:noFill/>
+          </a:ln>
+          <a:effectLst/>
+        </p:spPr>
+        <p:style>
+          <a:lnRef idx="1">
+            <a:schemeClr val="accent1"/>
+          </a:lnRef>
+          <a:fillRef idx="3">
+            <a:schemeClr val="accent1"/>
+          </a:fillRef>
+          <a:effectRef idx="2">
+            <a:schemeClr val="accent1"/>
+          </a:effectRef>
+          <a:fontRef idx="minor">
+            <a:schemeClr val="lt1"/>
+          </a:fontRef>
+        </p:style>
+        <p:txBody>
+          <a:bodyPr rtlCol="0" anchor="ctr"/>
+          <a:lstStyle/>
+          <a:p>
+            <a:pPr algn="ctr"/>
+          </a:p>
+        </p:txBody>
+      </p:sp>
+      <p:sp>
+        <p:nvSpPr>
+          <p:cNvPr id="53" name="TextBox 52"/>
+          <p:cNvSpPr txBox="1"/>
+          <p:nvPr/>
+        </p:nvSpPr>
+        <p:spPr>
+          <a:xfrm>
+            <a:off x="4306824" y="5458968"/>
+            <a:ext cx="1965960" cy="393192"/>
+          </a:xfrm>
+          <a:prstGeom prst="rect">
+            <a:avLst/>
+          </a:prstGeom>
+          <a:noFill/>
+        </p:spPr>
+        <p:txBody>
+          <a:bodyPr wrap="square" anchor="ctr">
+            <a:spAutoFit/>
+          </a:bodyPr>
+          <a:lstStyle/>
+          <a:p>
+            <a:pPr algn="l"/>
+            <a:r>
+              <a:rPr sz="1100" b="0" i="0">
+                <a:solidFill>
+                  <a:srgbClr val="293136"/>
+                </a:solidFill>
+                <a:latin typeface="Calibri"/>
+              </a:rPr>
+              <a:t>9,7 / 6</a:t>
+            </a:r>
+          </a:p>
+        </p:txBody>
+      </p:sp>
+      <p:sp>
+        <p:nvSpPr>
+          <p:cNvPr id="54" name="Rectangle 53"/>
+          <p:cNvSpPr/>
+          <p:nvPr/>
+        </p:nvSpPr>
+        <p:spPr>
+          <a:xfrm>
+            <a:off x="4251960" y="5852160"/>
+            <a:ext cx="2057400" cy="411480"/>
+          </a:xfrm>
+          <a:prstGeom prst="rect">
+            <a:avLst/>
+          </a:prstGeom>
+          <a:solidFill>
+            <a:srgbClr val="FFFFFF"/>
+          </a:solidFill>
+          <a:ln>
+            <a:noFill/>
+          </a:ln>
+          <a:effectLst/>
+        </p:spPr>
+        <p:style>
+          <a:lnRef idx="1">
+            <a:schemeClr val="accent1"/>
+          </a:lnRef>
+          <a:fillRef idx="3">
+            <a:schemeClr val="accent1"/>
+          </a:fillRef>
+          <a:effectRef idx="2">
+            <a:schemeClr val="accent1"/>
+          </a:effectRef>
+          <a:fontRef idx="minor">
+            <a:schemeClr val="lt1"/>
+          </a:fontRef>
+        </p:style>
+        <p:txBody>
+          <a:bodyPr rtlCol="0" anchor="ctr"/>
+          <a:lstStyle/>
+          <a:p>
+            <a:pPr algn="ctr"/>
+          </a:p>
+        </p:txBody>
+      </p:sp>
+      <p:sp>
+        <p:nvSpPr>
+          <p:cNvPr id="55" name="TextBox 54"/>
+          <p:cNvSpPr txBox="1"/>
+          <p:nvPr/>
+        </p:nvSpPr>
+        <p:spPr>
+          <a:xfrm>
+            <a:off x="4306824" y="5870448"/>
+            <a:ext cx="1965960" cy="393192"/>
+          </a:xfrm>
+          <a:prstGeom prst="rect">
+            <a:avLst/>
+          </a:prstGeom>
+          <a:noFill/>
+        </p:spPr>
+        <p:txBody>
+          <a:bodyPr wrap="square" anchor="ctr">
+            <a:spAutoFit/>
+          </a:bodyPr>
+          <a:lstStyle/>
+          <a:p>
+            <a:pPr algn="l"/>
+            <a:r>
+              <a:rPr sz="1100" b="0" i="0">
+                <a:solidFill>
+                  <a:srgbClr val="293136"/>
+                </a:solidFill>
+                <a:latin typeface="Calibri"/>
+              </a:rPr>
+              <a:t>≤10</a:t>
+            </a:r>
+          </a:p>
+        </p:txBody>
+      </p:sp>
+      <p:sp>
+        <p:nvSpPr>
+          <p:cNvPr id="56" name="Rectangle 55"/>
+          <p:cNvSpPr/>
+          <p:nvPr/>
+        </p:nvSpPr>
+        <p:spPr>
+          <a:xfrm>
+            <a:off x="6309360" y="1325880"/>
+            <a:ext cx="2057400" cy="411480"/>
+          </a:xfrm>
+          <a:prstGeom prst="rect">
+            <a:avLst/>
+          </a:prstGeom>
+          <a:solidFill>
+            <a:srgbClr val="293136"/>
+          </a:solidFill>
+          <a:ln>
+            <a:noFill/>
+          </a:ln>
+          <a:effectLst/>
+        </p:spPr>
+        <p:style>
+          <a:lnRef idx="1">
+            <a:schemeClr val="accent1"/>
+          </a:lnRef>
+          <a:fillRef idx="3">
+            <a:schemeClr val="accent1"/>
+          </a:fillRef>
+          <a:effectRef idx="2">
+            <a:schemeClr val="accent1"/>
+          </a:effectRef>
+          <a:fontRef idx="minor">
+            <a:schemeClr val="lt1"/>
+          </a:fontRef>
+        </p:style>
+        <p:txBody>
+          <a:bodyPr rtlCol="0" anchor="ctr"/>
+          <a:lstStyle/>
+          <a:p>
+            <a:pPr algn="ctr"/>
+          </a:p>
+        </p:txBody>
+      </p:sp>
+      <p:sp>
+        <p:nvSpPr>
+          <p:cNvPr id="57" name="TextBox 56"/>
+          <p:cNvSpPr txBox="1"/>
+          <p:nvPr/>
+        </p:nvSpPr>
+        <p:spPr>
+          <a:xfrm>
+            <a:off x="6364224" y="1344168"/>
+            <a:ext cx="1965960" cy="393192"/>
+          </a:xfrm>
+          <a:prstGeom prst="rect">
+            <a:avLst/>
+          </a:prstGeom>
+          <a:noFill/>
+        </p:spPr>
+        <p:txBody>
+          <a:bodyPr wrap="square" anchor="ctr">
+            <a:spAutoFit/>
+          </a:bodyPr>
+          <a:lstStyle/>
+          <a:p>
+            <a:pPr algn="l"/>
+            <a:r>
+              <a:rPr sz="1100" b="1" i="0">
+                <a:solidFill>
+                  <a:srgbClr val="FFFFFF"/>
+                </a:solidFill>
+                <a:latin typeface="Calibri"/>
+              </a:rPr>
+              <a:t>730E</a:t>
+            </a:r>
+          </a:p>
+        </p:txBody>
+      </p:sp>
+      <p:sp>
+        <p:nvSpPr>
+          <p:cNvPr id="58" name="Rectangle 57"/>
+          <p:cNvSpPr/>
+          <p:nvPr/>
+        </p:nvSpPr>
+        <p:spPr>
+          <a:xfrm>
+            <a:off x="6309360" y="1737360"/>
+            <a:ext cx="2057400" cy="411480"/>
+          </a:xfrm>
+          <a:prstGeom prst="rect">
+            <a:avLst/>
+          </a:prstGeom>
+          <a:solidFill>
+            <a:srgbClr val="FFFFFF"/>
+          </a:solidFill>
+          <a:ln>
+            <a:noFill/>
+          </a:ln>
+          <a:effectLst/>
+        </p:spPr>
+        <p:style>
+          <a:lnRef idx="1">
+            <a:schemeClr val="accent1"/>
+          </a:lnRef>
+          <a:fillRef idx="3">
+            <a:schemeClr val="accent1"/>
+          </a:fillRef>
+          <a:effectRef idx="2">
+            <a:schemeClr val="accent1"/>
+          </a:effectRef>
+          <a:fontRef idx="minor">
+            <a:schemeClr val="lt1"/>
+          </a:fontRef>
+        </p:style>
+        <p:txBody>
+          <a:bodyPr rtlCol="0" anchor="ctr"/>
+          <a:lstStyle/>
+          <a:p>
+            <a:pPr algn="ctr"/>
+          </a:p>
+        </p:txBody>
+      </p:sp>
+      <p:sp>
+        <p:nvSpPr>
+          <p:cNvPr id="59" name="TextBox 58"/>
+          <p:cNvSpPr txBox="1"/>
+          <p:nvPr/>
+        </p:nvSpPr>
+        <p:spPr>
+          <a:xfrm>
+            <a:off x="6364224" y="1755648"/>
+            <a:ext cx="1965960" cy="393192"/>
+          </a:xfrm>
+          <a:prstGeom prst="rect">
+            <a:avLst/>
+          </a:prstGeom>
+          <a:noFill/>
+        </p:spPr>
+        <p:txBody>
+          <a:bodyPr wrap="square" anchor="ctr">
+            <a:spAutoFit/>
+          </a:bodyPr>
+          <a:lstStyle/>
+          <a:p>
+            <a:pPr algn="l"/>
+            <a:r>
+              <a:rPr sz="1100" b="0" i="0">
+                <a:solidFill>
+                  <a:srgbClr val="293136"/>
+                </a:solidFill>
+                <a:latin typeface="Calibri"/>
+              </a:rPr>
+              <a:t>100%</a:t>
+            </a:r>
+          </a:p>
+        </p:txBody>
+      </p:sp>
+      <p:sp>
+        <p:nvSpPr>
+          <p:cNvPr id="60" name="Rectangle 59"/>
+          <p:cNvSpPr/>
+          <p:nvPr/>
+        </p:nvSpPr>
+        <p:spPr>
+          <a:xfrm>
+            <a:off x="6309360" y="2148840"/>
+            <a:ext cx="2057400" cy="411480"/>
+          </a:xfrm>
+          <a:prstGeom prst="rect">
+            <a:avLst/>
+          </a:prstGeom>
+          <a:solidFill>
+            <a:srgbClr val="ECEFF1"/>
+          </a:solidFill>
+          <a:ln>
+            <a:noFill/>
+          </a:ln>
+          <a:effectLst/>
+        </p:spPr>
+        <p:style>
+          <a:lnRef idx="1">
+            <a:schemeClr val="accent1"/>
+          </a:lnRef>
+          <a:fillRef idx="3">
+            <a:schemeClr val="accent1"/>
+          </a:fillRef>
+          <a:effectRef idx="2">
+            <a:schemeClr val="accent1"/>
+          </a:effectRef>
+          <a:fontRef idx="minor">
+            <a:schemeClr val="lt1"/>
+          </a:fontRef>
+        </p:style>
+        <p:txBody>
+          <a:bodyPr rtlCol="0" anchor="ctr"/>
+          <a:lstStyle/>
+          <a:p>
+            <a:pPr algn="ctr"/>
+          </a:p>
+        </p:txBody>
+      </p:sp>
+      <p:sp>
+        <p:nvSpPr>
+          <p:cNvPr id="61" name="TextBox 60"/>
+          <p:cNvSpPr txBox="1"/>
+          <p:nvPr/>
+        </p:nvSpPr>
+        <p:spPr>
+          <a:xfrm>
+            <a:off x="6364224" y="2167128"/>
+            <a:ext cx="1965960" cy="393192"/>
+          </a:xfrm>
+          <a:prstGeom prst="rect">
+            <a:avLst/>
+          </a:prstGeom>
+          <a:noFill/>
+        </p:spPr>
+        <p:txBody>
+          <a:bodyPr wrap="square" anchor="ctr">
+            <a:spAutoFit/>
+          </a:bodyPr>
+          <a:lstStyle/>
+          <a:p>
+            <a:pPr algn="l"/>
+            <a:r>
+              <a:rPr sz="1100" b="0" i="0">
+                <a:solidFill>
+                  <a:srgbClr val="293136"/>
+                </a:solidFill>
+                <a:latin typeface="Calibri"/>
+              </a:rPr>
+              <a:t>ВКЛ</a:t>
+            </a:r>
+          </a:p>
+        </p:txBody>
+      </p:sp>
+      <p:sp>
+        <p:nvSpPr>
+          <p:cNvPr id="62" name="Rectangle 61"/>
+          <p:cNvSpPr/>
+          <p:nvPr/>
+        </p:nvSpPr>
+        <p:spPr>
+          <a:xfrm>
+            <a:off x="6309360" y="2560320"/>
+            <a:ext cx="2057400" cy="411480"/>
+          </a:xfrm>
+          <a:prstGeom prst="rect">
+            <a:avLst/>
+          </a:prstGeom>
+          <a:solidFill>
+            <a:srgbClr val="FFFFFF"/>
+          </a:solidFill>
+          <a:ln>
+            <a:noFill/>
+          </a:ln>
+          <a:effectLst/>
+        </p:spPr>
+        <p:style>
+          <a:lnRef idx="1">
+            <a:schemeClr val="accent1"/>
+          </a:lnRef>
+          <a:fillRef idx="3">
+            <a:schemeClr val="accent1"/>
+          </a:fillRef>
+          <a:effectRef idx="2">
+            <a:schemeClr val="accent1"/>
+          </a:effectRef>
+          <a:fontRef idx="minor">
+            <a:schemeClr val="lt1"/>
+          </a:fontRef>
+        </p:style>
+        <p:txBody>
+          <a:bodyPr rtlCol="0" anchor="ctr"/>
+          <a:lstStyle/>
+          <a:p>
+            <a:pPr algn="ctr"/>
+          </a:p>
+        </p:txBody>
+      </p:sp>
+      <p:sp>
+        <p:nvSpPr>
+          <p:cNvPr id="63" name="TextBox 62"/>
+          <p:cNvSpPr txBox="1"/>
+          <p:nvPr/>
+        </p:nvSpPr>
+        <p:spPr>
+          <a:xfrm>
+            <a:off x="6364224" y="2578608"/>
+            <a:ext cx="1965960" cy="393192"/>
+          </a:xfrm>
+          <a:prstGeom prst="rect">
+            <a:avLst/>
+          </a:prstGeom>
+          <a:noFill/>
+        </p:spPr>
+        <p:txBody>
+          <a:bodyPr wrap="square" anchor="ctr">
+            <a:spAutoFit/>
+          </a:bodyPr>
+          <a:lstStyle/>
+          <a:p>
+            <a:pPr algn="l"/>
+            <a:r>
+              <a:rPr sz="1100" b="0" i="0">
+                <a:solidFill>
+                  <a:srgbClr val="293136"/>
+                </a:solidFill>
+                <a:latin typeface="Calibri"/>
+              </a:rPr>
+              <a:t>ВКЛ</a:t>
+            </a:r>
+          </a:p>
+        </p:txBody>
+      </p:sp>
+      <p:sp>
+        <p:nvSpPr>
+          <p:cNvPr id="64" name="Rectangle 63"/>
+          <p:cNvSpPr/>
+          <p:nvPr/>
+        </p:nvSpPr>
+        <p:spPr>
+          <a:xfrm>
+            <a:off x="6309360" y="2971800"/>
+            <a:ext cx="2057400" cy="411480"/>
+          </a:xfrm>
+          <a:prstGeom prst="rect">
+            <a:avLst/>
+          </a:prstGeom>
+          <a:solidFill>
+            <a:srgbClr val="ECEFF1"/>
+          </a:solidFill>
+          <a:ln>
+            <a:noFill/>
+          </a:ln>
+          <a:effectLst/>
+        </p:spPr>
+        <p:style>
+          <a:lnRef idx="1">
+            <a:schemeClr val="accent1"/>
+          </a:lnRef>
+          <a:fillRef idx="3">
+            <a:schemeClr val="accent1"/>
+          </a:fillRef>
+          <a:effectRef idx="2">
+            <a:schemeClr val="accent1"/>
+          </a:effectRef>
+          <a:fontRef idx="minor">
+            <a:schemeClr val="lt1"/>
+          </a:fontRef>
+        </p:style>
+        <p:txBody>
+          <a:bodyPr rtlCol="0" anchor="ctr"/>
+          <a:lstStyle/>
+          <a:p>
+            <a:pPr algn="ctr"/>
+          </a:p>
+        </p:txBody>
+      </p:sp>
+      <p:sp>
+        <p:nvSpPr>
+          <p:cNvPr id="65" name="TextBox 64"/>
+          <p:cNvSpPr txBox="1"/>
+          <p:nvPr/>
+        </p:nvSpPr>
+        <p:spPr>
+          <a:xfrm>
+            <a:off x="6364224" y="2990088"/>
+            <a:ext cx="1965960" cy="393192"/>
+          </a:xfrm>
+          <a:prstGeom prst="rect">
+            <a:avLst/>
+          </a:prstGeom>
+          <a:noFill/>
+        </p:spPr>
+        <p:txBody>
+          <a:bodyPr wrap="square" anchor="ctr">
+            <a:spAutoFit/>
+          </a:bodyPr>
+          <a:lstStyle/>
+          <a:p>
+            <a:pPr algn="l"/>
+            <a:r>
+              <a:rPr sz="1100" b="0" i="0">
+                <a:solidFill>
+                  <a:srgbClr val="293136"/>
+                </a:solidFill>
+                <a:latin typeface="Calibri"/>
+              </a:rPr>
+              <a:t>1990</a:t>
+            </a:r>
+          </a:p>
+        </p:txBody>
+      </p:sp>
+      <p:sp>
+        <p:nvSpPr>
+          <p:cNvPr id="66" name="Rectangle 65"/>
+          <p:cNvSpPr/>
+          <p:nvPr/>
+        </p:nvSpPr>
+        <p:spPr>
+          <a:xfrm>
+            <a:off x="6309360" y="3383280"/>
+            <a:ext cx="2057400" cy="411480"/>
+          </a:xfrm>
+          <a:prstGeom prst="rect">
+            <a:avLst/>
+          </a:prstGeom>
+          <a:solidFill>
+            <a:srgbClr val="FFFFFF"/>
+          </a:solidFill>
+          <a:ln>
+            <a:noFill/>
+          </a:ln>
+          <a:effectLst/>
+        </p:spPr>
+        <p:style>
+          <a:lnRef idx="1">
+            <a:schemeClr val="accent1"/>
+          </a:lnRef>
+          <a:fillRef idx="3">
+            <a:schemeClr val="accent1"/>
+          </a:fillRef>
+          <a:effectRef idx="2">
+            <a:schemeClr val="accent1"/>
+          </a:effectRef>
+          <a:fontRef idx="minor">
+            <a:schemeClr val="lt1"/>
+          </a:fontRef>
+        </p:style>
+        <p:txBody>
+          <a:bodyPr rtlCol="0" anchor="ctr"/>
+          <a:lstStyle/>
+          <a:p>
+            <a:pPr algn="ctr"/>
+          </a:p>
+        </p:txBody>
+      </p:sp>
+      <p:sp>
+        <p:nvSpPr>
+          <p:cNvPr id="67" name="TextBox 66"/>
+          <p:cNvSpPr txBox="1"/>
+          <p:nvPr/>
+        </p:nvSpPr>
+        <p:spPr>
+          <a:xfrm>
+            <a:off x="6364224" y="3401568"/>
+            <a:ext cx="1965960" cy="393192"/>
+          </a:xfrm>
+          <a:prstGeom prst="rect">
+            <a:avLst/>
+          </a:prstGeom>
+          <a:noFill/>
+        </p:spPr>
+        <p:txBody>
+          <a:bodyPr wrap="square" anchor="ctr">
+            <a:spAutoFit/>
+          </a:bodyPr>
+          <a:lstStyle/>
+          <a:p>
+            <a:pPr algn="l"/>
+            <a:r>
+              <a:rPr sz="1100" b="0" i="0">
+                <a:solidFill>
+                  <a:srgbClr val="293136"/>
+                </a:solidFill>
+                <a:latin typeface="Calibri"/>
+              </a:rPr>
+              <a:t>~540</a:t>
+            </a:r>
+          </a:p>
+        </p:txBody>
+      </p:sp>
+      <p:sp>
+        <p:nvSpPr>
+          <p:cNvPr id="68" name="Rectangle 67"/>
+          <p:cNvSpPr/>
+          <p:nvPr/>
+        </p:nvSpPr>
+        <p:spPr>
+          <a:xfrm>
+            <a:off x="6309360" y="3794760"/>
+            <a:ext cx="2057400" cy="411480"/>
+          </a:xfrm>
+          <a:prstGeom prst="rect">
+            <a:avLst/>
+          </a:prstGeom>
+          <a:solidFill>
+            <a:srgbClr val="ECEFF1"/>
+          </a:solidFill>
+          <a:ln>
+            <a:noFill/>
+          </a:ln>
+          <a:effectLst/>
+        </p:spPr>
+        <p:style>
+          <a:lnRef idx="1">
+            <a:schemeClr val="accent1"/>
+          </a:lnRef>
+          <a:fillRef idx="3">
+            <a:schemeClr val="accent1"/>
+          </a:fillRef>
+          <a:effectRef idx="2">
+            <a:schemeClr val="accent1"/>
+          </a:effectRef>
+          <a:fontRef idx="minor">
+            <a:schemeClr val="lt1"/>
+          </a:fontRef>
+        </p:style>
+        <p:txBody>
+          <a:bodyPr rtlCol="0" anchor="ctr"/>
+          <a:lstStyle/>
+          <a:p>
+            <a:pPr algn="ctr"/>
+          </a:p>
+        </p:txBody>
+      </p:sp>
+      <p:sp>
+        <p:nvSpPr>
+          <p:cNvPr id="69" name="TextBox 68"/>
+          <p:cNvSpPr txBox="1"/>
+          <p:nvPr/>
+        </p:nvSpPr>
+        <p:spPr>
+          <a:xfrm>
+            <a:off x="6364224" y="3813048"/>
+            <a:ext cx="1965960" cy="393192"/>
+          </a:xfrm>
+          <a:prstGeom prst="rect">
+            <a:avLst/>
+          </a:prstGeom>
+          <a:noFill/>
+        </p:spPr>
+        <p:txBody>
+          <a:bodyPr wrap="square" anchor="ctr">
+            <a:spAutoFit/>
+          </a:bodyPr>
+          <a:lstStyle/>
+          <a:p>
+            <a:pPr algn="l"/>
+            <a:r>
+              <a:rPr sz="1100" b="0" i="0">
+                <a:solidFill>
+                  <a:srgbClr val="293136"/>
+                </a:solidFill>
+                <a:latin typeface="Calibri"/>
+              </a:rPr>
+              <a:t>нет*</a:t>
+            </a:r>
+          </a:p>
+        </p:txBody>
+      </p:sp>
+      <p:sp>
+        <p:nvSpPr>
+          <p:cNvPr id="70" name="Rectangle 69"/>
+          <p:cNvSpPr/>
+          <p:nvPr/>
+        </p:nvSpPr>
+        <p:spPr>
+          <a:xfrm>
+            <a:off x="6309360" y="4206240"/>
+            <a:ext cx="2057400" cy="411480"/>
+          </a:xfrm>
+          <a:prstGeom prst="rect">
+            <a:avLst/>
+          </a:prstGeom>
+          <a:solidFill>
+            <a:srgbClr val="FFFFFF"/>
+          </a:solidFill>
+          <a:ln>
+            <a:noFill/>
+          </a:ln>
+          <a:effectLst/>
+        </p:spPr>
+        <p:style>
+          <a:lnRef idx="1">
+            <a:schemeClr val="accent1"/>
+          </a:lnRef>
+          <a:fillRef idx="3">
+            <a:schemeClr val="accent1"/>
+          </a:fillRef>
+          <a:effectRef idx="2">
+            <a:schemeClr val="accent1"/>
+          </a:effectRef>
+          <a:fontRef idx="minor">
+            <a:schemeClr val="lt1"/>
+          </a:fontRef>
+        </p:style>
+        <p:txBody>
+          <a:bodyPr rtlCol="0" anchor="ctr"/>
+          <a:lstStyle/>
+          <a:p>
+            <a:pPr algn="ctr"/>
+          </a:p>
+        </p:txBody>
+      </p:sp>
+      <p:sp>
+        <p:nvSpPr>
+          <p:cNvPr id="71" name="TextBox 70"/>
+          <p:cNvSpPr txBox="1"/>
+          <p:nvPr/>
+        </p:nvSpPr>
+        <p:spPr>
+          <a:xfrm>
+            <a:off x="6364224" y="4224528"/>
+            <a:ext cx="1965960" cy="393192"/>
+          </a:xfrm>
+          <a:prstGeom prst="rect">
+            <a:avLst/>
+          </a:prstGeom>
+          <a:noFill/>
+        </p:spPr>
+        <p:txBody>
+          <a:bodyPr wrap="square" anchor="ctr">
+            <a:spAutoFit/>
+          </a:bodyPr>
+          <a:lstStyle/>
+          <a:p>
+            <a:pPr algn="l"/>
+            <a:r>
+              <a:rPr sz="1100" b="0" i="0">
+                <a:solidFill>
+                  <a:srgbClr val="293136"/>
+                </a:solidFill>
+                <a:latin typeface="Calibri"/>
+              </a:rPr>
+              <a:t>соблюд.</a:t>
+            </a:r>
+          </a:p>
+        </p:txBody>
+      </p:sp>
+      <p:sp>
+        <p:nvSpPr>
+          <p:cNvPr id="72" name="Rectangle 71"/>
+          <p:cNvSpPr/>
+          <p:nvPr/>
+        </p:nvSpPr>
+        <p:spPr>
+          <a:xfrm>
+            <a:off x="6309360" y="4617720"/>
+            <a:ext cx="2057400" cy="411480"/>
+          </a:xfrm>
+          <a:prstGeom prst="rect">
+            <a:avLst/>
+          </a:prstGeom>
+          <a:solidFill>
+            <a:srgbClr val="ECEFF1"/>
+          </a:solidFill>
+          <a:ln>
+            <a:noFill/>
+          </a:ln>
+          <a:effectLst/>
+        </p:spPr>
+        <p:style>
+          <a:lnRef idx="1">
+            <a:schemeClr val="accent1"/>
+          </a:lnRef>
+          <a:fillRef idx="3">
+            <a:schemeClr val="accent1"/>
+          </a:fillRef>
+          <a:effectRef idx="2">
+            <a:schemeClr val="accent1"/>
+          </a:effectRef>
+          <a:fontRef idx="minor">
+            <a:schemeClr val="lt1"/>
+          </a:fontRef>
+        </p:style>
+        <p:txBody>
+          <a:bodyPr rtlCol="0" anchor="ctr"/>
+          <a:lstStyle/>
+          <a:p>
+            <a:pPr algn="ctr"/>
+          </a:p>
+        </p:txBody>
+      </p:sp>
+      <p:sp>
+        <p:nvSpPr>
+          <p:cNvPr id="73" name="TextBox 72"/>
+          <p:cNvSpPr txBox="1"/>
+          <p:nvPr/>
+        </p:nvSpPr>
+        <p:spPr>
+          <a:xfrm>
+            <a:off x="6364224" y="4636008"/>
+            <a:ext cx="1965960" cy="393192"/>
+          </a:xfrm>
+          <a:prstGeom prst="rect">
+            <a:avLst/>
+          </a:prstGeom>
+          <a:noFill/>
+        </p:spPr>
+        <p:txBody>
+          <a:bodyPr wrap="square" anchor="ctr">
+            <a:spAutoFit/>
+          </a:bodyPr>
+          <a:lstStyle/>
+          <a:p>
+            <a:pPr algn="l"/>
+            <a:r>
+              <a:rPr sz="1100" b="0" i="0">
+                <a:solidFill>
+                  <a:srgbClr val="293136"/>
+                </a:solidFill>
+                <a:latin typeface="Calibri"/>
+              </a:rPr>
+              <a:t>15W-40 CI-4</a:t>
+            </a:r>
+          </a:p>
+        </p:txBody>
+      </p:sp>
+      <p:sp>
+        <p:nvSpPr>
+          <p:cNvPr id="74" name="Rectangle 73"/>
+          <p:cNvSpPr/>
+          <p:nvPr/>
+        </p:nvSpPr>
+        <p:spPr>
+          <a:xfrm>
+            <a:off x="6309360" y="5029200"/>
+            <a:ext cx="2057400" cy="411480"/>
+          </a:xfrm>
+          <a:prstGeom prst="rect">
+            <a:avLst/>
+          </a:prstGeom>
+          <a:solidFill>
+            <a:srgbClr val="FFFFFF"/>
+          </a:solidFill>
+          <a:ln>
+            <a:noFill/>
+          </a:ln>
+          <a:effectLst/>
+        </p:spPr>
+        <p:style>
+          <a:lnRef idx="1">
+            <a:schemeClr val="accent1"/>
+          </a:lnRef>
+          <a:fillRef idx="3">
+            <a:schemeClr val="accent1"/>
+          </a:fillRef>
+          <a:effectRef idx="2">
+            <a:schemeClr val="accent1"/>
+          </a:effectRef>
+          <a:fontRef idx="minor">
+            <a:schemeClr val="lt1"/>
+          </a:fontRef>
+        </p:style>
+        <p:txBody>
+          <a:bodyPr rtlCol="0" anchor="ctr"/>
+          <a:lstStyle/>
+          <a:p>
+            <a:pPr algn="ctr"/>
+          </a:p>
+        </p:txBody>
+      </p:sp>
+      <p:sp>
+        <p:nvSpPr>
+          <p:cNvPr id="75" name="TextBox 74"/>
+          <p:cNvSpPr txBox="1"/>
+          <p:nvPr/>
+        </p:nvSpPr>
+        <p:spPr>
+          <a:xfrm>
+            <a:off x="6364224" y="5047488"/>
+            <a:ext cx="1965960" cy="393192"/>
+          </a:xfrm>
+          <a:prstGeom prst="rect">
+            <a:avLst/>
+          </a:prstGeom>
+          <a:noFill/>
+        </p:spPr>
+        <p:txBody>
+          <a:bodyPr wrap="square" anchor="ctr">
+            <a:spAutoFit/>
+          </a:bodyPr>
+          <a:lstStyle/>
+          <a:p>
+            <a:pPr algn="l"/>
+            <a:r>
+              <a:rPr sz="1100" b="0" i="0">
+                <a:solidFill>
+                  <a:srgbClr val="293136"/>
+                </a:solidFill>
+                <a:latin typeface="Calibri"/>
+              </a:rPr>
+              <a:t>0,4</a:t>
+            </a:r>
+          </a:p>
+        </p:txBody>
+      </p:sp>
+      <p:sp>
+        <p:nvSpPr>
+          <p:cNvPr id="76" name="Rectangle 75"/>
+          <p:cNvSpPr/>
+          <p:nvPr/>
+        </p:nvSpPr>
+        <p:spPr>
+          <a:xfrm>
+            <a:off x="6309360" y="5440680"/>
+            <a:ext cx="2057400" cy="411480"/>
+          </a:xfrm>
+          <a:prstGeom prst="rect">
+            <a:avLst/>
+          </a:prstGeom>
+          <a:solidFill>
+            <a:srgbClr val="ECEFF1"/>
+          </a:solidFill>
+          <a:ln>
+            <a:noFill/>
+          </a:ln>
+          <a:effectLst/>
+        </p:spPr>
+        <p:style>
+          <a:lnRef idx="1">
+            <a:schemeClr val="accent1"/>
+          </a:lnRef>
+          <a:fillRef idx="3">
+            <a:schemeClr val="accent1"/>
+          </a:fillRef>
+          <a:effectRef idx="2">
+            <a:schemeClr val="accent1"/>
+          </a:effectRef>
+          <a:fontRef idx="minor">
+            <a:schemeClr val="lt1"/>
+          </a:fontRef>
+        </p:style>
+        <p:txBody>
+          <a:bodyPr rtlCol="0" anchor="ctr"/>
+          <a:lstStyle/>
+          <a:p>
+            <a:pPr algn="ctr"/>
+          </a:p>
+        </p:txBody>
+      </p:sp>
+      <p:sp>
+        <p:nvSpPr>
+          <p:cNvPr id="77" name="TextBox 76"/>
+          <p:cNvSpPr txBox="1"/>
+          <p:nvPr/>
+        </p:nvSpPr>
+        <p:spPr>
+          <a:xfrm>
+            <a:off x="6364224" y="5458968"/>
+            <a:ext cx="1965960" cy="393192"/>
+          </a:xfrm>
+          <a:prstGeom prst="rect">
+            <a:avLst/>
+          </a:prstGeom>
+          <a:noFill/>
+        </p:spPr>
+        <p:txBody>
+          <a:bodyPr wrap="square" anchor="ctr">
+            <a:spAutoFit/>
+          </a:bodyPr>
+          <a:lstStyle/>
+          <a:p>
+            <a:pPr algn="l"/>
+            <a:r>
+              <a:rPr sz="1100" b="0" i="0">
+                <a:solidFill>
+                  <a:srgbClr val="293136"/>
+                </a:solidFill>
+                <a:latin typeface="Calibri"/>
+              </a:rPr>
+              <a:t>9,5 / 16</a:t>
+            </a:r>
+          </a:p>
+        </p:txBody>
+      </p:sp>
+      <p:sp>
+        <p:nvSpPr>
+          <p:cNvPr id="78" name="Rectangle 77"/>
+          <p:cNvSpPr/>
+          <p:nvPr/>
+        </p:nvSpPr>
+        <p:spPr>
+          <a:xfrm>
+            <a:off x="6309360" y="5852160"/>
+            <a:ext cx="2057400" cy="411480"/>
+          </a:xfrm>
+          <a:prstGeom prst="rect">
+            <a:avLst/>
+          </a:prstGeom>
+          <a:solidFill>
+            <a:srgbClr val="FFFFFF"/>
+          </a:solidFill>
+          <a:ln>
+            <a:noFill/>
+          </a:ln>
+          <a:effectLst/>
+        </p:spPr>
+        <p:style>
+          <a:lnRef idx="1">
+            <a:schemeClr val="accent1"/>
+          </a:lnRef>
+          <a:fillRef idx="3">
+            <a:schemeClr val="accent1"/>
+          </a:fillRef>
+          <a:effectRef idx="2">
+            <a:schemeClr val="accent1"/>
+          </a:effectRef>
+          <a:fontRef idx="minor">
+            <a:schemeClr val="lt1"/>
+          </a:fontRef>
+        </p:style>
+        <p:txBody>
+          <a:bodyPr rtlCol="0" anchor="ctr"/>
+          <a:lstStyle/>
+          <a:p>
+            <a:pPr algn="ctr"/>
+          </a:p>
+        </p:txBody>
+      </p:sp>
+      <p:sp>
+        <p:nvSpPr>
+          <p:cNvPr id="79" name="TextBox 78"/>
+          <p:cNvSpPr txBox="1"/>
+          <p:nvPr/>
+        </p:nvSpPr>
+        <p:spPr>
+          <a:xfrm>
+            <a:off x="6364224" y="5870448"/>
+            <a:ext cx="1965960" cy="393192"/>
+          </a:xfrm>
+          <a:prstGeom prst="rect">
+            <a:avLst/>
+          </a:prstGeom>
+          <a:noFill/>
+        </p:spPr>
+        <p:txBody>
+          <a:bodyPr wrap="square" anchor="ctr">
+            <a:spAutoFit/>
+          </a:bodyPr>
+          <a:lstStyle/>
+          <a:p>
+            <a:pPr algn="l"/>
+            <a:r>
+              <a:rPr sz="1100" b="0" i="0">
+                <a:solidFill>
+                  <a:srgbClr val="293136"/>
+                </a:solidFill>
+                <a:latin typeface="Calibri"/>
+              </a:rPr>
+              <a:t>≤10</a:t>
+            </a:r>
+          </a:p>
+        </p:txBody>
+      </p:sp>
+      <p:sp>
+        <p:nvSpPr>
+          <p:cNvPr id="80" name="Rectangle 79"/>
+          <p:cNvSpPr/>
+          <p:nvPr/>
+        </p:nvSpPr>
+        <p:spPr>
+          <a:xfrm>
+            <a:off x="8366760" y="1325880"/>
+            <a:ext cx="3429000" cy="411480"/>
+          </a:xfrm>
+          <a:prstGeom prst="rect">
+            <a:avLst/>
+          </a:prstGeom>
+          <a:solidFill>
+            <a:srgbClr val="293136"/>
+          </a:solidFill>
+          <a:ln>
+            <a:noFill/>
+          </a:ln>
+          <a:effectLst/>
+        </p:spPr>
+        <p:style>
+          <a:lnRef idx="1">
+            <a:schemeClr val="accent1"/>
+          </a:lnRef>
+          <a:fillRef idx="3">
+            <a:schemeClr val="accent1"/>
+          </a:fillRef>
+          <a:effectRef idx="2">
+            <a:schemeClr val="accent1"/>
+          </a:effectRef>
+          <a:fontRef idx="minor">
+            <a:schemeClr val="lt1"/>
+          </a:fontRef>
+        </p:style>
+        <p:txBody>
+          <a:bodyPr rtlCol="0" anchor="ctr"/>
+          <a:lstStyle/>
+          <a:p>
+            <a:pPr algn="ctr"/>
+          </a:p>
+        </p:txBody>
+      </p:sp>
+      <p:sp>
+        <p:nvSpPr>
+          <p:cNvPr id="81" name="TextBox 80"/>
+          <p:cNvSpPr txBox="1"/>
+          <p:nvPr/>
+        </p:nvSpPr>
+        <p:spPr>
+          <a:xfrm>
+            <a:off x="8421624" y="1344168"/>
+            <a:ext cx="3337560" cy="393192"/>
+          </a:xfrm>
+          <a:prstGeom prst="rect">
+            <a:avLst/>
+          </a:prstGeom>
+          <a:noFill/>
+        </p:spPr>
+        <p:txBody>
+          <a:bodyPr wrap="square" anchor="ctr">
+            <a:spAutoFit/>
+          </a:bodyPr>
+          <a:lstStyle/>
+          <a:p>
+            <a:pPr algn="l"/>
+            <a:r>
+              <a:rPr sz="1100" b="1" i="0">
+                <a:solidFill>
+                  <a:srgbClr val="FFFFFF"/>
+                </a:solidFill>
+                <a:latin typeface="Calibri"/>
+              </a:rPr>
+              <a:t>Дифференцирует отказ?</a:t>
+            </a:r>
+          </a:p>
+        </p:txBody>
+      </p:sp>
+      <p:sp>
+        <p:nvSpPr>
+          <p:cNvPr id="82" name="Rectangle 81"/>
+          <p:cNvSpPr/>
+          <p:nvPr/>
+        </p:nvSpPr>
+        <p:spPr>
+          <a:xfrm>
+            <a:off x="8366760" y="1737360"/>
+            <a:ext cx="3429000" cy="411480"/>
+          </a:xfrm>
+          <a:prstGeom prst="rect">
+            <a:avLst/>
+          </a:prstGeom>
+          <a:solidFill>
+            <a:srgbClr val="FFFFFF"/>
+          </a:solidFill>
+          <a:ln>
+            <a:noFill/>
+          </a:ln>
+          <a:effectLst/>
+        </p:spPr>
+        <p:style>
+          <a:lnRef idx="1">
+            <a:schemeClr val="accent1"/>
+          </a:lnRef>
+          <a:fillRef idx="3">
+            <a:schemeClr val="accent1"/>
+          </a:fillRef>
+          <a:effectRef idx="2">
+            <a:schemeClr val="accent1"/>
+          </a:effectRef>
+          <a:fontRef idx="minor">
+            <a:schemeClr val="lt1"/>
+          </a:fontRef>
+        </p:style>
+        <p:txBody>
+          <a:bodyPr rtlCol="0" anchor="ctr"/>
+          <a:lstStyle/>
+          <a:p>
+            <a:pPr algn="ctr"/>
+          </a:p>
+        </p:txBody>
+      </p:sp>
+      <p:sp>
+        <p:nvSpPr>
+          <p:cNvPr id="83" name="TextBox 82"/>
+          <p:cNvSpPr txBox="1"/>
+          <p:nvPr/>
+        </p:nvSpPr>
+        <p:spPr>
+          <a:xfrm>
+            <a:off x="8421624" y="1755648"/>
+            <a:ext cx="3337560" cy="393192"/>
+          </a:xfrm>
+          <a:prstGeom prst="rect">
+            <a:avLst/>
+          </a:prstGeom>
+          <a:noFill/>
+        </p:spPr>
+        <p:txBody>
+          <a:bodyPr wrap="square" anchor="ctr">
+            <a:spAutoFit/>
+          </a:bodyPr>
+          <a:lstStyle/>
+          <a:p>
+            <a:pPr algn="l"/>
+            <a:r>
+              <a:rPr sz="1100" b="0" i="0">
+                <a:solidFill>
+                  <a:srgbClr val="293136"/>
+                </a:solidFill>
+                <a:latin typeface="Calibri"/>
+              </a:rPr>
+              <a:t>🔴 ДА — калибровка</a:t>
+            </a:r>
+          </a:p>
+        </p:txBody>
+      </p:sp>
+      <p:sp>
+        <p:nvSpPr>
+          <p:cNvPr id="84" name="Rectangle 83"/>
+          <p:cNvSpPr/>
+          <p:nvPr/>
+        </p:nvSpPr>
+        <p:spPr>
+          <a:xfrm>
+            <a:off x="8366760" y="2148840"/>
+            <a:ext cx="3429000" cy="411480"/>
+          </a:xfrm>
+          <a:prstGeom prst="rect">
+            <a:avLst/>
+          </a:prstGeom>
+          <a:solidFill>
+            <a:srgbClr val="ECEFF1"/>
+          </a:solidFill>
+          <a:ln>
+            <a:noFill/>
+          </a:ln>
+          <a:effectLst/>
+        </p:spPr>
+        <p:style>
+          <a:lnRef idx="1">
+            <a:schemeClr val="accent1"/>
+          </a:lnRef>
+          <a:fillRef idx="3">
+            <a:schemeClr val="accent1"/>
+          </a:fillRef>
+          <a:effectRef idx="2">
+            <a:schemeClr val="accent1"/>
+          </a:effectRef>
+          <a:fontRef idx="minor">
+            <a:schemeClr val="lt1"/>
+          </a:fontRef>
+        </p:style>
+        <p:txBody>
+          <a:bodyPr rtlCol="0" anchor="ctr"/>
+          <a:lstStyle/>
+          <a:p>
+            <a:pPr algn="ctr"/>
+          </a:p>
+        </p:txBody>
+      </p:sp>
+      <p:sp>
+        <p:nvSpPr>
+          <p:cNvPr id="85" name="TextBox 84"/>
+          <p:cNvSpPr txBox="1"/>
+          <p:nvPr/>
+        </p:nvSpPr>
+        <p:spPr>
+          <a:xfrm>
+            <a:off x="8421624" y="2167128"/>
+            <a:ext cx="3337560" cy="393192"/>
+          </a:xfrm>
+          <a:prstGeom prst="rect">
+            <a:avLst/>
+          </a:prstGeom>
+          <a:noFill/>
+        </p:spPr>
+        <p:txBody>
+          <a:bodyPr wrap="square" anchor="ctr">
+            <a:spAutoFit/>
+          </a:bodyPr>
+          <a:lstStyle/>
+          <a:p>
+            <a:pPr algn="l"/>
+            <a:r>
+              <a:rPr sz="1100" b="0" i="0">
+                <a:solidFill>
+                  <a:srgbClr val="293136"/>
+                </a:solidFill>
+                <a:latin typeface="Calibri"/>
+              </a:rPr>
+              <a:t>🔴 ДА — калибровка</a:t>
+            </a:r>
+          </a:p>
+        </p:txBody>
+      </p:sp>
+      <p:sp>
+        <p:nvSpPr>
+          <p:cNvPr id="86" name="Rectangle 85"/>
+          <p:cNvSpPr/>
+          <p:nvPr/>
+        </p:nvSpPr>
+        <p:spPr>
+          <a:xfrm>
+            <a:off x="8366760" y="2560320"/>
+            <a:ext cx="3429000" cy="411480"/>
+          </a:xfrm>
+          <a:prstGeom prst="rect">
+            <a:avLst/>
+          </a:prstGeom>
+          <a:solidFill>
+            <a:srgbClr val="FFFFFF"/>
+          </a:solidFill>
+          <a:ln>
+            <a:noFill/>
+          </a:ln>
+          <a:effectLst/>
+        </p:spPr>
+        <p:style>
+          <a:lnRef idx="1">
+            <a:schemeClr val="accent1"/>
+          </a:lnRef>
+          <a:fillRef idx="3">
+            <a:schemeClr val="accent1"/>
+          </a:fillRef>
+          <a:effectRef idx="2">
+            <a:schemeClr val="accent1"/>
+          </a:effectRef>
+          <a:fontRef idx="minor">
+            <a:schemeClr val="lt1"/>
+          </a:fontRef>
+        </p:style>
+        <p:txBody>
+          <a:bodyPr rtlCol="0" anchor="ctr"/>
+          <a:lstStyle/>
+          <a:p>
+            <a:pPr algn="ctr"/>
+          </a:p>
+        </p:txBody>
+      </p:sp>
+      <p:sp>
+        <p:nvSpPr>
+          <p:cNvPr id="87" name="TextBox 86"/>
+          <p:cNvSpPr txBox="1"/>
+          <p:nvPr/>
+        </p:nvSpPr>
+        <p:spPr>
+          <a:xfrm>
+            <a:off x="8421624" y="2578608"/>
+            <a:ext cx="3337560" cy="393192"/>
+          </a:xfrm>
+          <a:prstGeom prst="rect">
+            <a:avLst/>
+          </a:prstGeom>
+          <a:noFill/>
+        </p:spPr>
+        <p:txBody>
+          <a:bodyPr wrap="square" anchor="ctr">
+            <a:spAutoFit/>
+          </a:bodyPr>
+          <a:lstStyle/>
+          <a:p>
+            <a:pPr algn="l"/>
+            <a:r>
+              <a:rPr sz="1100" b="0" i="0">
+                <a:solidFill>
+                  <a:srgbClr val="293136"/>
+                </a:solidFill>
+                <a:latin typeface="Calibri"/>
+              </a:rPr>
+              <a:t>🔴 ДА — калибровка</a:t>
+            </a:r>
+          </a:p>
+        </p:txBody>
+      </p:sp>
+      <p:sp>
+        <p:nvSpPr>
+          <p:cNvPr id="88" name="Rectangle 87"/>
+          <p:cNvSpPr/>
+          <p:nvPr/>
+        </p:nvSpPr>
+        <p:spPr>
+          <a:xfrm>
+            <a:off x="8366760" y="2971800"/>
+            <a:ext cx="3429000" cy="411480"/>
+          </a:xfrm>
+          <a:prstGeom prst="rect">
+            <a:avLst/>
+          </a:prstGeom>
+          <a:solidFill>
+            <a:srgbClr val="ECEFF1"/>
+          </a:solidFill>
+          <a:ln>
+            <a:noFill/>
+          </a:ln>
+          <a:effectLst/>
+        </p:spPr>
+        <p:style>
+          <a:lnRef idx="1">
+            <a:schemeClr val="accent1"/>
+          </a:lnRef>
+          <a:fillRef idx="3">
+            <a:schemeClr val="accent1"/>
+          </a:fillRef>
+          <a:effectRef idx="2">
+            <a:schemeClr val="accent1"/>
+          </a:effectRef>
+          <a:fontRef idx="minor">
+            <a:schemeClr val="lt1"/>
+          </a:fontRef>
+        </p:style>
+        <p:txBody>
+          <a:bodyPr rtlCol="0" anchor="ctr"/>
+          <a:lstStyle/>
+          <a:p>
+            <a:pPr algn="ctr"/>
+          </a:p>
+        </p:txBody>
+      </p:sp>
+      <p:sp>
+        <p:nvSpPr>
+          <p:cNvPr id="89" name="TextBox 88"/>
+          <p:cNvSpPr txBox="1"/>
+          <p:nvPr/>
+        </p:nvSpPr>
+        <p:spPr>
+          <a:xfrm>
+            <a:off x="8421624" y="2990088"/>
+            <a:ext cx="3337560" cy="393192"/>
+          </a:xfrm>
+          <a:prstGeom prst="rect">
+            <a:avLst/>
+          </a:prstGeom>
+          <a:noFill/>
+        </p:spPr>
+        <p:txBody>
+          <a:bodyPr wrap="square" anchor="ctr">
+            <a:spAutoFit/>
+          </a:bodyPr>
+          <a:lstStyle/>
+          <a:p>
+            <a:pPr algn="l"/>
+            <a:r>
+              <a:rPr sz="1100" b="0" i="0">
+                <a:solidFill>
+                  <a:srgbClr val="293136"/>
+                </a:solidFill>
+                <a:latin typeface="Calibri"/>
+              </a:rPr>
+              <a:t>🔴 ДА — калибровка</a:t>
+            </a:r>
+          </a:p>
+        </p:txBody>
+      </p:sp>
+      <p:sp>
+        <p:nvSpPr>
+          <p:cNvPr id="90" name="Rectangle 89"/>
+          <p:cNvSpPr/>
+          <p:nvPr/>
+        </p:nvSpPr>
+        <p:spPr>
+          <a:xfrm>
+            <a:off x="8366760" y="3383280"/>
+            <a:ext cx="3429000" cy="411480"/>
+          </a:xfrm>
+          <a:prstGeom prst="rect">
+            <a:avLst/>
+          </a:prstGeom>
+          <a:solidFill>
+            <a:srgbClr val="FFFFFF"/>
+          </a:solidFill>
+          <a:ln>
+            <a:noFill/>
+          </a:ln>
+          <a:effectLst/>
+        </p:spPr>
+        <p:style>
+          <a:lnRef idx="1">
+            <a:schemeClr val="accent1"/>
+          </a:lnRef>
+          <a:fillRef idx="3">
+            <a:schemeClr val="accent1"/>
+          </a:fillRef>
+          <a:effectRef idx="2">
+            <a:schemeClr val="accent1"/>
+          </a:effectRef>
+          <a:fontRef idx="minor">
+            <a:schemeClr val="lt1"/>
+          </a:fontRef>
+        </p:style>
+        <p:txBody>
+          <a:bodyPr rtlCol="0" anchor="ctr"/>
+          <a:lstStyle/>
+          <a:p>
+            <a:pPr algn="ctr"/>
+          </a:p>
+        </p:txBody>
+      </p:sp>
+      <p:sp>
+        <p:nvSpPr>
+          <p:cNvPr id="91" name="TextBox 90"/>
+          <p:cNvSpPr txBox="1"/>
+          <p:nvPr/>
+        </p:nvSpPr>
+        <p:spPr>
+          <a:xfrm>
+            <a:off x="8421624" y="3401568"/>
+            <a:ext cx="3337560" cy="393192"/>
+          </a:xfrm>
+          <a:prstGeom prst="rect">
+            <a:avLst/>
+          </a:prstGeom>
+          <a:noFill/>
+        </p:spPr>
+        <p:txBody>
+          <a:bodyPr wrap="square" anchor="ctr">
+            <a:spAutoFit/>
+          </a:bodyPr>
+          <a:lstStyle/>
+          <a:p>
+            <a:pPr algn="l"/>
+            <a:r>
+              <a:rPr sz="1100" b="0" i="0">
+                <a:solidFill>
+                  <a:srgbClr val="293136"/>
+                </a:solidFill>
+                <a:latin typeface="Calibri"/>
+              </a:rPr>
+              <a:t>🔴 следствие</a:t>
+            </a:r>
+          </a:p>
+        </p:txBody>
+      </p:sp>
+      <p:sp>
+        <p:nvSpPr>
+          <p:cNvPr id="92" name="Rectangle 91"/>
+          <p:cNvSpPr/>
+          <p:nvPr/>
+        </p:nvSpPr>
+        <p:spPr>
+          <a:xfrm>
+            <a:off x="8366760" y="3794760"/>
+            <a:ext cx="3429000" cy="411480"/>
+          </a:xfrm>
+          <a:prstGeom prst="rect">
+            <a:avLst/>
+          </a:prstGeom>
+          <a:solidFill>
+            <a:srgbClr val="ECEFF1"/>
+          </a:solidFill>
+          <a:ln>
+            <a:noFill/>
+          </a:ln>
+          <a:effectLst/>
+        </p:spPr>
+        <p:style>
+          <a:lnRef idx="1">
+            <a:schemeClr val="accent1"/>
+          </a:lnRef>
+          <a:fillRef idx="3">
+            <a:schemeClr val="accent1"/>
+          </a:fillRef>
+          <a:effectRef idx="2">
+            <a:schemeClr val="accent1"/>
+          </a:effectRef>
+          <a:fontRef idx="minor">
+            <a:schemeClr val="lt1"/>
+          </a:fontRef>
+        </p:style>
+        <p:txBody>
+          <a:bodyPr rtlCol="0" anchor="ctr"/>
+          <a:lstStyle/>
+          <a:p>
+            <a:pPr algn="ctr"/>
+          </a:p>
+        </p:txBody>
+      </p:sp>
+      <p:sp>
+        <p:nvSpPr>
+          <p:cNvPr id="93" name="TextBox 92"/>
+          <p:cNvSpPr txBox="1"/>
+          <p:nvPr/>
+        </p:nvSpPr>
+        <p:spPr>
+          <a:xfrm>
+            <a:off x="8421624" y="3813048"/>
+            <a:ext cx="3337560" cy="393192"/>
+          </a:xfrm>
+          <a:prstGeom prst="rect">
+            <a:avLst/>
+          </a:prstGeom>
+          <a:noFill/>
+        </p:spPr>
+        <p:txBody>
+          <a:bodyPr wrap="square" anchor="ctr">
+            <a:spAutoFit/>
+          </a:bodyPr>
+          <a:lstStyle/>
+          <a:p>
+            <a:pPr algn="l"/>
+            <a:r>
+              <a:rPr sz="1100" b="0" i="0">
+                <a:solidFill>
+                  <a:srgbClr val="293136"/>
+                </a:solidFill>
+                <a:latin typeface="Calibri"/>
+              </a:rPr>
+              <a:t>🟠 фон (конструкция)</a:t>
+            </a:r>
+          </a:p>
+        </p:txBody>
+      </p:sp>
+      <p:sp>
+        <p:nvSpPr>
+          <p:cNvPr id="94" name="Rectangle 93"/>
+          <p:cNvSpPr/>
+          <p:nvPr/>
+        </p:nvSpPr>
+        <p:spPr>
+          <a:xfrm>
+            <a:off x="8366760" y="4206240"/>
+            <a:ext cx="3429000" cy="411480"/>
+          </a:xfrm>
+          <a:prstGeom prst="rect">
+            <a:avLst/>
+          </a:prstGeom>
+          <a:solidFill>
+            <a:srgbClr val="FFFFFF"/>
+          </a:solidFill>
+          <a:ln>
+            <a:noFill/>
+          </a:ln>
+          <a:effectLst/>
+        </p:spPr>
+        <p:style>
+          <a:lnRef idx="1">
+            <a:schemeClr val="accent1"/>
+          </a:lnRef>
+          <a:fillRef idx="3">
+            <a:schemeClr val="accent1"/>
+          </a:fillRef>
+          <a:effectRef idx="2">
+            <a:schemeClr val="accent1"/>
+          </a:effectRef>
+          <a:fontRef idx="minor">
+            <a:schemeClr val="lt1"/>
+          </a:fontRef>
+        </p:style>
+        <p:txBody>
+          <a:bodyPr rtlCol="0" anchor="ctr"/>
+          <a:lstStyle/>
+          <a:p>
+            <a:pPr algn="ctr"/>
+          </a:p>
+        </p:txBody>
+      </p:sp>
+      <p:sp>
+        <p:nvSpPr>
+          <p:cNvPr id="95" name="TextBox 94"/>
+          <p:cNvSpPr txBox="1"/>
+          <p:nvPr/>
+        </p:nvSpPr>
+        <p:spPr>
+          <a:xfrm>
+            <a:off x="8421624" y="4224528"/>
+            <a:ext cx="3337560" cy="393192"/>
+          </a:xfrm>
+          <a:prstGeom prst="rect">
+            <a:avLst/>
+          </a:prstGeom>
+          <a:noFill/>
+        </p:spPr>
+        <p:txBody>
+          <a:bodyPr wrap="square" anchor="ctr">
+            <a:spAutoFit/>
+          </a:bodyPr>
+          <a:lstStyle/>
+          <a:p>
+            <a:pPr algn="l"/>
+            <a:r>
+              <a:rPr sz="1100" b="0" i="0">
+                <a:solidFill>
+                  <a:srgbClr val="293136"/>
+                </a:solidFill>
+                <a:latin typeface="Calibri"/>
+              </a:rPr>
+              <a:t>🟢 нет</a:t>
+            </a:r>
+          </a:p>
+        </p:txBody>
+      </p:sp>
+      <p:sp>
+        <p:nvSpPr>
+          <p:cNvPr id="96" name="Rectangle 95"/>
+          <p:cNvSpPr/>
+          <p:nvPr/>
+        </p:nvSpPr>
+        <p:spPr>
+          <a:xfrm>
+            <a:off x="8366760" y="4617720"/>
+            <a:ext cx="3429000" cy="411480"/>
+          </a:xfrm>
+          <a:prstGeom prst="rect">
+            <a:avLst/>
+          </a:prstGeom>
+          <a:solidFill>
+            <a:srgbClr val="ECEFF1"/>
+          </a:solidFill>
+          <a:ln>
+            <a:noFill/>
+          </a:ln>
+          <a:effectLst/>
+        </p:spPr>
+        <p:style>
+          <a:lnRef idx="1">
+            <a:schemeClr val="accent1"/>
+          </a:lnRef>
+          <a:fillRef idx="3">
+            <a:schemeClr val="accent1"/>
+          </a:fillRef>
+          <a:effectRef idx="2">
+            <a:schemeClr val="accent1"/>
+          </a:effectRef>
+          <a:fontRef idx="minor">
+            <a:schemeClr val="lt1"/>
+          </a:fontRef>
+        </p:style>
+        <p:txBody>
+          <a:bodyPr rtlCol="0" anchor="ctr"/>
+          <a:lstStyle/>
+          <a:p>
+            <a:pPr algn="ctr"/>
+          </a:p>
+        </p:txBody>
+      </p:sp>
+      <p:sp>
+        <p:nvSpPr>
+          <p:cNvPr id="97" name="TextBox 96"/>
+          <p:cNvSpPr txBox="1"/>
+          <p:nvPr/>
+        </p:nvSpPr>
+        <p:spPr>
+          <a:xfrm>
+            <a:off x="8421624" y="4636008"/>
+            <a:ext cx="3337560" cy="393192"/>
+          </a:xfrm>
+          <a:prstGeom prst="rect">
+            <a:avLst/>
+          </a:prstGeom>
+          <a:noFill/>
+        </p:spPr>
+        <p:txBody>
+          <a:bodyPr wrap="square" anchor="ctr">
+            <a:spAutoFit/>
+          </a:bodyPr>
+          <a:lstStyle/>
+          <a:p>
+            <a:pPr algn="l"/>
+            <a:r>
+              <a:rPr sz="1100" b="0" i="0">
+                <a:solidFill>
+                  <a:srgbClr val="293136"/>
+                </a:solidFill>
+                <a:latin typeface="Calibri"/>
+              </a:rPr>
+              <a:t>🟢 нет</a:t>
+            </a:r>
+          </a:p>
+        </p:txBody>
+      </p:sp>
+      <p:sp>
+        <p:nvSpPr>
+          <p:cNvPr id="98" name="Rectangle 97"/>
+          <p:cNvSpPr/>
+          <p:nvPr/>
+        </p:nvSpPr>
+        <p:spPr>
+          <a:xfrm>
+            <a:off x="8366760" y="5029200"/>
+            <a:ext cx="3429000" cy="411480"/>
+          </a:xfrm>
+          <a:prstGeom prst="rect">
+            <a:avLst/>
+          </a:prstGeom>
+          <a:solidFill>
+            <a:srgbClr val="FFFFFF"/>
+          </a:solidFill>
+          <a:ln>
+            <a:noFill/>
+          </a:ln>
+          <a:effectLst/>
+        </p:spPr>
+        <p:style>
+          <a:lnRef idx="1">
+            <a:schemeClr val="accent1"/>
+          </a:lnRef>
+          <a:fillRef idx="3">
+            <a:schemeClr val="accent1"/>
+          </a:fillRef>
+          <a:effectRef idx="2">
+            <a:schemeClr val="accent1"/>
+          </a:effectRef>
+          <a:fontRef idx="minor">
+            <a:schemeClr val="lt1"/>
+          </a:fontRef>
+        </p:style>
+        <p:txBody>
+          <a:bodyPr rtlCol="0" anchor="ctr"/>
+          <a:lstStyle/>
+          <a:p>
+            <a:pPr algn="ctr"/>
+          </a:p>
+        </p:txBody>
+      </p:sp>
+      <p:sp>
+        <p:nvSpPr>
+          <p:cNvPr id="99" name="TextBox 98"/>
+          <p:cNvSpPr txBox="1"/>
+          <p:nvPr/>
+        </p:nvSpPr>
+        <p:spPr>
+          <a:xfrm>
+            <a:off x="8421624" y="5047488"/>
+            <a:ext cx="3337560" cy="393192"/>
+          </a:xfrm>
+          <a:prstGeom prst="rect">
+            <a:avLst/>
+          </a:prstGeom>
+          <a:noFill/>
+        </p:spPr>
+        <p:txBody>
+          <a:bodyPr wrap="square" anchor="ctr">
+            <a:spAutoFit/>
+          </a:bodyPr>
+          <a:lstStyle/>
+          <a:p>
+            <a:pPr algn="l"/>
+            <a:r>
+              <a:rPr sz="1100" b="0" i="0">
+                <a:solidFill>
+                  <a:srgbClr val="293136"/>
+                </a:solidFill>
+                <a:latin typeface="Calibri"/>
+              </a:rPr>
+              <a:t>🟢 нет</a:t>
+            </a:r>
+          </a:p>
+        </p:txBody>
+      </p:sp>
+      <p:sp>
+        <p:nvSpPr>
+          <p:cNvPr id="100" name="Rectangle 99"/>
+          <p:cNvSpPr/>
+          <p:nvPr/>
+        </p:nvSpPr>
+        <p:spPr>
+          <a:xfrm>
+            <a:off x="8366760" y="5440680"/>
+            <a:ext cx="3429000" cy="411480"/>
+          </a:xfrm>
+          <a:prstGeom prst="rect">
+            <a:avLst/>
+          </a:prstGeom>
+          <a:solidFill>
+            <a:srgbClr val="ECEFF1"/>
+          </a:solidFill>
+          <a:ln>
+            <a:noFill/>
+          </a:ln>
+          <a:effectLst/>
+        </p:spPr>
+        <p:style>
+          <a:lnRef idx="1">
+            <a:schemeClr val="accent1"/>
+          </a:lnRef>
+          <a:fillRef idx="3">
+            <a:schemeClr val="accent1"/>
+          </a:fillRef>
+          <a:effectRef idx="2">
+            <a:schemeClr val="accent1"/>
+          </a:effectRef>
+          <a:fontRef idx="minor">
+            <a:schemeClr val="lt1"/>
+          </a:fontRef>
+        </p:style>
+        <p:txBody>
+          <a:bodyPr rtlCol="0" anchor="ctr"/>
+          <a:lstStyle/>
+          <a:p>
+            <a:pPr algn="ctr"/>
+          </a:p>
+        </p:txBody>
+      </p:sp>
+      <p:sp>
+        <p:nvSpPr>
+          <p:cNvPr id="101" name="TextBox 100"/>
+          <p:cNvSpPr txBox="1"/>
+          <p:nvPr/>
+        </p:nvSpPr>
+        <p:spPr>
+          <a:xfrm>
+            <a:off x="8421624" y="5458968"/>
+            <a:ext cx="3337560" cy="393192"/>
+          </a:xfrm>
+          <a:prstGeom prst="rect">
+            <a:avLst/>
+          </a:prstGeom>
+          <a:noFill/>
+        </p:spPr>
+        <p:txBody>
+          <a:bodyPr wrap="square" anchor="ctr">
+            <a:spAutoFit/>
+          </a:bodyPr>
+          <a:lstStyle/>
+          <a:p>
+            <a:pPr algn="l"/>
+            <a:r>
+              <a:rPr sz="1100" b="0" i="0">
+                <a:solidFill>
+                  <a:srgbClr val="293136"/>
+                </a:solidFill>
+                <a:latin typeface="Calibri"/>
+              </a:rPr>
+              <a:t>🟢 нет (Fe ниже)</a:t>
+            </a:r>
+          </a:p>
+        </p:txBody>
+      </p:sp>
+      <p:sp>
+        <p:nvSpPr>
+          <p:cNvPr id="102" name="Rectangle 101"/>
+          <p:cNvSpPr/>
+          <p:nvPr/>
+        </p:nvSpPr>
+        <p:spPr>
+          <a:xfrm>
+            <a:off x="8366760" y="5852160"/>
+            <a:ext cx="3429000" cy="411480"/>
+          </a:xfrm>
+          <a:prstGeom prst="rect">
+            <a:avLst/>
+          </a:prstGeom>
+          <a:solidFill>
+            <a:srgbClr val="FFFFFF"/>
+          </a:solidFill>
+          <a:ln>
+            <a:noFill/>
+          </a:ln>
+          <a:effectLst/>
+        </p:spPr>
+        <p:style>
+          <a:lnRef idx="1">
+            <a:schemeClr val="accent1"/>
+          </a:lnRef>
+          <a:fillRef idx="3">
+            <a:schemeClr val="accent1"/>
+          </a:fillRef>
+          <a:effectRef idx="2">
+            <a:schemeClr val="accent1"/>
+          </a:effectRef>
+          <a:fontRef idx="minor">
+            <a:schemeClr val="lt1"/>
+          </a:fontRef>
+        </p:style>
+        <p:txBody>
+          <a:bodyPr rtlCol="0" anchor="ctr"/>
+          <a:lstStyle/>
+          <a:p>
+            <a:pPr algn="ctr"/>
+          </a:p>
+        </p:txBody>
+      </p:sp>
+      <p:sp>
+        <p:nvSpPr>
+          <p:cNvPr id="103" name="TextBox 102"/>
+          <p:cNvSpPr txBox="1"/>
+          <p:nvPr/>
+        </p:nvSpPr>
+        <p:spPr>
+          <a:xfrm>
+            <a:off x="8421624" y="5870448"/>
+            <a:ext cx="3337560" cy="393192"/>
+          </a:xfrm>
+          <a:prstGeom prst="rect">
+            <a:avLst/>
+          </a:prstGeom>
+          <a:noFill/>
+        </p:spPr>
+        <p:txBody>
+          <a:bodyPr wrap="square" anchor="ctr">
+            <a:spAutoFit/>
+          </a:bodyPr>
+          <a:lstStyle/>
+          <a:p>
+            <a:pPr algn="l"/>
+            <a:r>
+              <a:rPr sz="1100" b="0" i="0">
+                <a:solidFill>
+                  <a:srgbClr val="293136"/>
+                </a:solidFill>
+                <a:latin typeface="Calibri"/>
+              </a:rPr>
+              <a:t>🟢 нет</a:t>
+            </a:r>
+          </a:p>
+        </p:txBody>
+      </p:sp>
+      <p:sp>
+        <p:nvSpPr>
+          <p:cNvPr id="104" name="TextBox 103"/>
+          <p:cNvSpPr txBox="1"/>
+          <p:nvPr/>
+        </p:nvSpPr>
+        <p:spPr>
+          <a:xfrm>
+            <a:off x="365760" y="5989320"/>
+            <a:ext cx="11430000" cy="457200"/>
+          </a:xfrm>
+          <a:prstGeom prst="rect">
+            <a:avLst/>
+          </a:prstGeom>
+          <a:noFill/>
+        </p:spPr>
+        <p:txBody>
+          <a:bodyPr wrap="square" anchor="t">
+            <a:spAutoFit/>
+          </a:bodyPr>
+          <a:lstStyle/>
+          <a:p>
+            <a:pPr algn="l"/>
+            <a:r>
+              <a:rPr sz="1100" b="1" i="0">
+                <a:solidFill>
+                  <a:srgbClr val="E05252"/>
+                </a:solidFill>
+                <a:latin typeface="Calibri"/>
+              </a:rPr>
+              <a:t>Все дифференцирующие параметры (🔴) — в калибровке ЭБУ. Эксплуатация (масло/нагрузка/топливо, 🟢) — не различает парки.</a:t>
+            </a:r>
+          </a:p>
+        </p:txBody>
+      </p:sp>
+      <p:sp>
+        <p:nvSpPr>
+          <p:cNvPr id="105" name="Rectangle 104"/>
           <p:cNvSpPr/>
           <p:nvPr/>
         </p:nvSpPr>
@@ -15352,7 +17916,7 @@
       </p:sp>
       <p:sp>
         <p:nvSpPr>
-          <p:cNvPr id="41" name="TextBox 40"/>
+          <p:cNvPr id="106" name="TextBox 105"/>
           <p:cNvSpPr txBox="1"/>
           <p:nvPr/>
         </p:nvSpPr>
@@ -15609,7 +18173,7 @@
                 </a:solidFill>
                 <a:latin typeface="Calibri"/>
               </a:rPr>
-              <a:t>ОБЪЕКТИВНОСТЬ</a:t>
+              <a:t>ПЕРЕПИСКА</a:t>
             </a:r>
           </a:p>
         </p:txBody>
@@ -15644,7 +18208,7 @@
                 </a:solidFill>
                 <a:latin typeface="Calibri"/>
               </a:rPr>
-              <a:t>Достоверность и пробелы данных</a:t>
+              <a:t>Оценка писем NHL и Cummins</a:t>
             </a:r>
           </a:p>
         </p:txBody>
@@ -15658,7 +18222,7 @@
         <p:spPr>
           <a:xfrm>
             <a:off x="457200" y="1371600"/>
-            <a:ext cx="6764731" cy="502920"/>
+            <a:ext cx="6201003" cy="502920"/>
           </a:xfrm>
           <a:prstGeom prst="rect">
             <a:avLst/>
@@ -15702,7 +18266,7 @@
         <p:spPr>
           <a:xfrm>
             <a:off x="512064" y="1389888"/>
-            <a:ext cx="6673291" cy="484632"/>
+            <a:ext cx="6109563" cy="484632"/>
           </a:xfrm>
           <a:prstGeom prst="rect">
             <a:avLst/>
@@ -15723,7 +18287,7 @@
                 </a:solidFill>
                 <a:latin typeface="Calibri"/>
               </a:rPr>
-              <a:t>Пункт</a:t>
+              <a:t>Тезис письма</a:t>
             </a:r>
           </a:p>
         </p:txBody>
@@ -15737,7 +18301,7 @@
         <p:spPr>
           <a:xfrm>
             <a:off x="457200" y="1874519"/>
-            <a:ext cx="6764731" cy="502920"/>
+            <a:ext cx="6201003" cy="502920"/>
           </a:xfrm>
           <a:prstGeom prst="rect">
             <a:avLst/>
@@ -15781,7 +18345,7 @@
         <p:spPr>
           <a:xfrm>
             <a:off x="512064" y="1892807"/>
-            <a:ext cx="6673291" cy="484632"/>
+            <a:ext cx="6109563" cy="484632"/>
           </a:xfrm>
           <a:prstGeom prst="rect">
             <a:avLst/>
@@ -15802,7 +18366,7 @@
                 </a:solidFill>
                 <a:latin typeface="Calibri"/>
               </a:rPr>
-              <a:t>Даты ремонтов #47, #48</a:t>
+              <a:t>NHL: износ от зольности масла (SAPS)</a:t>
             </a:r>
           </a:p>
         </p:txBody>
@@ -15816,7 +18380,7 @@
         <p:spPr>
           <a:xfrm>
             <a:off x="457200" y="2377439"/>
-            <a:ext cx="6764731" cy="502920"/>
+            <a:ext cx="6201003" cy="502920"/>
           </a:xfrm>
           <a:prstGeom prst="rect">
             <a:avLst/>
@@ -15860,7 +18424,7 @@
         <p:spPr>
           <a:xfrm>
             <a:off x="512064" y="2395727"/>
-            <a:ext cx="6673291" cy="484632"/>
+            <a:ext cx="6109563" cy="484632"/>
           </a:xfrm>
           <a:prstGeom prst="rect">
             <a:avLst/>
@@ -15881,7 +18445,7 @@
                 </a:solidFill>
                 <a:latin typeface="Calibri"/>
               </a:rPr>
-              <a:t>Счёт ремонтов («30/24+» vs ~13)</a:t>
+              <a:t>NHL: пыль из карьера</a:t>
             </a:r>
           </a:p>
         </p:txBody>
@@ -15895,7 +18459,7 @@
         <p:spPr>
           <a:xfrm>
             <a:off x="457200" y="2880359"/>
-            <a:ext cx="6764731" cy="502920"/>
+            <a:ext cx="6201003" cy="502920"/>
           </a:xfrm>
           <a:prstGeom prst="rect">
             <a:avLst/>
@@ -15939,7 +18503,7 @@
         <p:spPr>
           <a:xfrm>
             <a:off x="512064" y="2898647"/>
-            <a:ext cx="6673291" cy="484632"/>
+            <a:ext cx="6109563" cy="484632"/>
           </a:xfrm>
           <a:prstGeom prst="rect">
             <a:avLst/>
@@ -15960,7 +18524,7 @@
                 </a:solidFill>
                 <a:latin typeface="Calibri"/>
               </a:rPr>
-              <a:t>«0 отказов 730E»</a:t>
+              <a:t>NHL: Stellite не нужен «для rated»</a:t>
             </a:r>
           </a:p>
         </p:txBody>
@@ -15974,7 +18538,7 @@
         <p:spPr>
           <a:xfrm>
             <a:off x="457200" y="3383279"/>
-            <a:ext cx="6764731" cy="502920"/>
+            <a:ext cx="6201003" cy="502920"/>
           </a:xfrm>
           <a:prstGeom prst="rect">
             <a:avLst/>
@@ -16018,7 +18582,7 @@
         <p:spPr>
           <a:xfrm>
             <a:off x="512064" y="3401567"/>
-            <a:ext cx="6673291" cy="484632"/>
+            <a:ext cx="6109563" cy="484632"/>
           </a:xfrm>
           <a:prstGeom prst="rect">
             <a:avLst/>
@@ -16039,7 +18603,7 @@
                 </a:solidFill>
                 <a:latin typeface="Calibri"/>
               </a:rPr>
-              <a:t>Цитаты Cummins 378-010/011, лимит 520 °C</a:t>
+              <a:t>NHL: регулировка клапанов на 1500/5000 ч</a:t>
             </a:r>
           </a:p>
         </p:txBody>
@@ -16053,7 +18617,7 @@
         <p:spPr>
           <a:xfrm>
             <a:off x="457200" y="3886199"/>
-            <a:ext cx="6764731" cy="502920"/>
+            <a:ext cx="6201003" cy="502920"/>
           </a:xfrm>
           <a:prstGeom prst="rect">
             <a:avLst/>
@@ -16097,7 +18661,7 @@
         <p:spPr>
           <a:xfrm>
             <a:off x="512064" y="3904487"/>
-            <a:ext cx="6673291" cy="484632"/>
+            <a:ext cx="6109563" cy="484632"/>
           </a:xfrm>
           <a:prstGeom prst="rect">
             <a:avLst/>
@@ -16118,7 +18682,7 @@
                 </a:solidFill>
                 <a:latin typeface="Calibri"/>
               </a:rPr>
-              <a:t>EGT 567 (#82 DML) vs 329 (#83 INSITE)</a:t>
+              <a:t>Cummins: масло CES20078 достаточно</a:t>
             </a:r>
           </a:p>
         </p:txBody>
@@ -16132,7 +18696,7 @@
         <p:spPr>
           <a:xfrm>
             <a:off x="457200" y="4389119"/>
-            <a:ext cx="6764731" cy="502920"/>
+            <a:ext cx="6201003" cy="502920"/>
           </a:xfrm>
           <a:prstGeom prst="rect">
             <a:avLst/>
@@ -16176,7 +18740,7 @@
         <p:spPr>
           <a:xfrm>
             <a:off x="512064" y="4407407"/>
-            <a:ext cx="6673291" cy="484632"/>
+            <a:ext cx="6109563" cy="484632"/>
           </a:xfrm>
           <a:prstGeom prst="rect">
             <a:avLst/>
@@ -16197,7 +18761,7 @@
                 </a:solidFill>
                 <a:latin typeface="Calibri"/>
               </a:rPr>
-              <a:t>Тоннаж 220 т / «295 т»</a:t>
+              <a:t>Cummins: на NTE200 защита по T масла отключена</a:t>
             </a:r>
           </a:p>
         </p:txBody>
@@ -16211,7 +18775,7 @@
         <p:spPr>
           <a:xfrm>
             <a:off x="457200" y="4892039"/>
-            <a:ext cx="6764731" cy="502920"/>
+            <a:ext cx="6201003" cy="502920"/>
           </a:xfrm>
           <a:prstGeom prst="rect">
             <a:avLst/>
@@ -16255,7 +18819,7 @@
         <p:spPr>
           <a:xfrm>
             <a:off x="512064" y="4910327"/>
-            <a:ext cx="6673291" cy="484632"/>
+            <a:ext cx="6109563" cy="484632"/>
           </a:xfrm>
           <a:prstGeom prst="rect">
             <a:avLst/>
@@ -16276,7 +18840,7 @@
                 </a:solidFill>
                 <a:latin typeface="Calibri"/>
               </a:rPr>
-              <a:t>Период проб масла</a:t>
+              <a:t>Cummins: «не поставляет Stellite»</a:t>
             </a:r>
           </a:p>
         </p:txBody>
@@ -16289,8 +18853,8 @@
         </p:nvSpPr>
         <p:spPr>
           <a:xfrm>
-            <a:off x="7221931" y="1371600"/>
-            <a:ext cx="4509820" cy="502920"/>
+            <a:off x="6658203" y="1371600"/>
+            <a:ext cx="5073548" cy="502920"/>
           </a:xfrm>
           <a:prstGeom prst="rect">
             <a:avLst/>
@@ -16333,8 +18897,8 @@
         </p:nvSpPr>
         <p:spPr>
           <a:xfrm>
-            <a:off x="7276795" y="1389888"/>
-            <a:ext cx="4418380" cy="484632"/>
+            <a:off x="6713067" y="1389888"/>
+            <a:ext cx="4982108" cy="484632"/>
           </a:xfrm>
           <a:prstGeom prst="rect">
             <a:avLst/>
@@ -16355,7 +18919,7 @@
                 </a:solidFill>
                 <a:latin typeface="Calibri"/>
               </a:rPr>
-              <a:t>Статус</a:t>
+              <a:t>Вердикт</a:t>
             </a:r>
           </a:p>
         </p:txBody>
@@ -16368,8 +18932,8 @@
         </p:nvSpPr>
         <p:spPr>
           <a:xfrm>
-            <a:off x="7221931" y="1874519"/>
-            <a:ext cx="4509820" cy="502920"/>
+            <a:off x="6658203" y="1874519"/>
+            <a:ext cx="5073548" cy="502920"/>
           </a:xfrm>
           <a:prstGeom prst="rect">
             <a:avLst/>
@@ -16412,8 +18976,8 @@
         </p:nvSpPr>
         <p:spPr>
           <a:xfrm>
-            <a:off x="7276795" y="1892807"/>
-            <a:ext cx="4418380" cy="484632"/>
+            <a:off x="6713067" y="1892807"/>
+            <a:ext cx="4982108" cy="484632"/>
           </a:xfrm>
           <a:prstGeom prst="rect">
             <a:avLst/>
@@ -16434,7 +18998,7 @@
                 </a:solidFill>
                 <a:latin typeface="Calibri"/>
               </a:rPr>
-              <a:t>❌ расходятся между источниками</a:t>
+              <a:t>❌ смещает на эксплуатацию (низкий Fe)</a:t>
             </a:r>
           </a:p>
         </p:txBody>
@@ -16447,8 +19011,8 @@
         </p:nvSpPr>
         <p:spPr>
           <a:xfrm>
-            <a:off x="7221931" y="2377439"/>
-            <a:ext cx="4509820" cy="502920"/>
+            <a:off x="6658203" y="2377439"/>
+            <a:ext cx="5073548" cy="502920"/>
           </a:xfrm>
           <a:prstGeom prst="rect">
             <a:avLst/>
@@ -16491,8 +19055,8 @@
         </p:nvSpPr>
         <p:spPr>
           <a:xfrm>
-            <a:off x="7276795" y="2395727"/>
-            <a:ext cx="4418380" cy="484632"/>
+            <a:off x="6713067" y="2395727"/>
+            <a:ext cx="4982108" cy="484632"/>
           </a:xfrm>
           <a:prstGeom prst="rect">
             <a:avLst/>
@@ -16513,7 +19077,7 @@
                 </a:solidFill>
                 <a:latin typeface="Calibri"/>
               </a:rPr>
-              <a:t>❌ прежняя оценка завышена</a:t>
+              <a:t>❌ переоценка (Si подчинён)</a:t>
             </a:r>
           </a:p>
         </p:txBody>
@@ -16526,8 +19090,8 @@
         </p:nvSpPr>
         <p:spPr>
           <a:xfrm>
-            <a:off x="7221931" y="2880359"/>
-            <a:ext cx="4509820" cy="502920"/>
+            <a:off x="6658203" y="2880359"/>
+            <a:ext cx="5073548" cy="502920"/>
           </a:xfrm>
           <a:prstGeom prst="rect">
             <a:avLst/>
@@ -16570,8 +19134,8 @@
         </p:nvSpPr>
         <p:spPr>
           <a:xfrm>
-            <a:off x="7276795" y="2898647"/>
-            <a:ext cx="4418380" cy="484632"/>
+            <a:off x="6713067" y="2898647"/>
+            <a:ext cx="4982108" cy="484632"/>
           </a:xfrm>
           <a:prstGeom prst="rect">
             <a:avLst/>
@@ -16592,7 +19156,7 @@
                 </a:solidFill>
                 <a:latin typeface="Calibri"/>
               </a:rPr>
-              <a:t>⚠️ нет полного реестра ремонтов 730E</a:t>
+              <a:t>❌ ложный (NTE200 ≠ rated: 567 °C)</a:t>
             </a:r>
           </a:p>
         </p:txBody>
@@ -16605,8 +19169,8 @@
         </p:nvSpPr>
         <p:spPr>
           <a:xfrm>
-            <a:off x="7221931" y="3383279"/>
-            <a:ext cx="4509820" cy="502920"/>
+            <a:off x="6658203" y="3383279"/>
+            <a:ext cx="5073548" cy="502920"/>
           </a:xfrm>
           <a:prstGeom prst="rect">
             <a:avLst/>
@@ -16649,8 +19213,8 @@
         </p:nvSpPr>
         <p:spPr>
           <a:xfrm>
-            <a:off x="7276795" y="3401567"/>
-            <a:ext cx="4418380" cy="484632"/>
+            <a:off x="6713067" y="3401567"/>
+            <a:ext cx="4982108" cy="484632"/>
           </a:xfrm>
           <a:prstGeom prst="rect">
             <a:avLst/>
@@ -16671,7 +19235,7 @@
                 </a:solidFill>
                 <a:latin typeface="Calibri"/>
               </a:rPr>
-              <a:t>⚠️ без дословного первоисточника</a:t>
+              <a:t>⚠️ косвенное признание проблемы</a:t>
             </a:r>
           </a:p>
         </p:txBody>
@@ -16684,8 +19248,8 @@
         </p:nvSpPr>
         <p:spPr>
           <a:xfrm>
-            <a:off x="7221931" y="3886199"/>
-            <a:ext cx="4509820" cy="502920"/>
+            <a:off x="6658203" y="3886199"/>
+            <a:ext cx="5073548" cy="502920"/>
           </a:xfrm>
           <a:prstGeom prst="rect">
             <a:avLst/>
@@ -16728,8 +19292,8 @@
         </p:nvSpPr>
         <p:spPr>
           <a:xfrm>
-            <a:off x="7276795" y="3904487"/>
-            <a:ext cx="4418380" cy="484632"/>
+            <a:off x="6713067" y="3904487"/>
+            <a:ext cx="4982108" cy="484632"/>
           </a:xfrm>
           <a:prstGeom prst="rect">
             <a:avLst/>
@@ -16750,7 +19314,7 @@
                 </a:solidFill>
                 <a:latin typeface="Calibri"/>
               </a:rPr>
-              <a:t>⚠️ разные машины/условия</a:t>
+              <a:t>❌ уход от корня</a:t>
             </a:r>
           </a:p>
         </p:txBody>
@@ -16763,8 +19327,8 @@
         </p:nvSpPr>
         <p:spPr>
           <a:xfrm>
-            <a:off x="7221931" y="4389119"/>
-            <a:ext cx="4509820" cy="502920"/>
+            <a:off x="6658203" y="4389119"/>
+            <a:ext cx="5073548" cy="502920"/>
           </a:xfrm>
           <a:prstGeom prst="rect">
             <a:avLst/>
@@ -16807,8 +19371,8 @@
         </p:nvSpPr>
         <p:spPr>
           <a:xfrm>
-            <a:off x="7276795" y="4407407"/>
-            <a:ext cx="4418380" cy="484632"/>
+            <a:off x="6713067" y="4407407"/>
+            <a:ext cx="4982108" cy="484632"/>
           </a:xfrm>
           <a:prstGeom prst="rect">
             <a:avLst/>
@@ -16829,7 +19393,7 @@
                 </a:solidFill>
                 <a:latin typeface="Calibri"/>
               </a:rPr>
-              <a:t>❌ исправлено на 180 т (239 т)</a:t>
+              <a:t>✅ ПОДТВЕРЖДАЕТ нашу находку</a:t>
             </a:r>
           </a:p>
         </p:txBody>
@@ -16842,8 +19406,8 @@
         </p:nvSpPr>
         <p:spPr>
           <a:xfrm>
-            <a:off x="7221931" y="4892039"/>
-            <a:ext cx="4509820" cy="502920"/>
+            <a:off x="6658203" y="4892039"/>
+            <a:ext cx="5073548" cy="502920"/>
           </a:xfrm>
           <a:prstGeom prst="rect">
             <a:avLst/>
@@ -16886,8 +19450,8 @@
         </p:nvSpPr>
         <p:spPr>
           <a:xfrm>
-            <a:off x="7276795" y="4910327"/>
-            <a:ext cx="4418380" cy="484632"/>
+            <a:off x="6713067" y="4910327"/>
+            <a:ext cx="4982108" cy="484632"/>
           </a:xfrm>
           <a:prstGeom prst="rect">
             <a:avLst/>
@@ -16908,7 +19472,7 @@
                 </a:solidFill>
                 <a:latin typeface="Calibri"/>
               </a:rPr>
-              <a:t>✅ 2024-02 — 2025-12</a:t>
+              <a:t>❌ уход от ответственности</a:t>
             </a:r>
           </a:p>
         </p:txBody>
@@ -17216,7 +19780,7 @@
                 </a:solidFill>
                 <a:latin typeface="Calibri"/>
               </a:rPr>
-              <a:t>ДЕЙСТВИЯ</a:t>
+              <a:t>ОБЪЕКТИВНОСТЬ</a:t>
             </a:r>
           </a:p>
         </p:txBody>
@@ -17251,7 +19815,7 @@
                 </a:solidFill>
                 <a:latin typeface="Calibri"/>
               </a:rPr>
-              <a:t>Рекомендации</a:t>
+              <a:t>Достоверность и пробелы данных</a:t>
             </a:r>
           </a:p>
         </p:txBody>
@@ -17264,14 +19828,14 @@
         </p:nvSpPr>
         <p:spPr>
           <a:xfrm>
-            <a:off x="457200" y="1280160"/>
-            <a:ext cx="2011680" cy="310896"/>
-          </a:xfrm>
-          <a:prstGeom prst="rect">
-            <a:avLst/>
-          </a:prstGeom>
-          <a:solidFill>
-            <a:srgbClr val="E05252"/>
+            <a:off x="457200" y="1371600"/>
+            <a:ext cx="6764731" cy="502920"/>
+          </a:xfrm>
+          <a:prstGeom prst="rect">
+            <a:avLst/>
+          </a:prstGeom>
+          <a:solidFill>
+            <a:srgbClr val="293136"/>
           </a:solidFill>
           <a:ln>
             <a:noFill/>
@@ -17308,359 +19872,1221 @@
         </p:nvSpPr>
         <p:spPr>
           <a:xfrm>
-            <a:off x="530352" y="1307592"/>
-            <a:ext cx="1901952" cy="274320"/>
-          </a:xfrm>
-          <a:prstGeom prst="rect">
-            <a:avLst/>
-          </a:prstGeom>
-          <a:noFill/>
-        </p:spPr>
-        <p:txBody>
-          <a:bodyPr wrap="square" anchor="t">
-            <a:spAutoFit/>
-          </a:bodyPr>
-          <a:lstStyle/>
-          <a:p>
-            <a:pPr algn="l"/>
-            <a:r>
-              <a:rPr sz="1100" b="1" i="0">
+            <a:off x="512064" y="1389888"/>
+            <a:ext cx="6673291" cy="484632"/>
+          </a:xfrm>
+          <a:prstGeom prst="rect">
+            <a:avLst/>
+          </a:prstGeom>
+          <a:noFill/>
+        </p:spPr>
+        <p:txBody>
+          <a:bodyPr wrap="square" anchor="ctr">
+            <a:spAutoFit/>
+          </a:bodyPr>
+          <a:lstStyle/>
+          <a:p>
+            <a:pPr algn="l"/>
+            <a:r>
+              <a:rPr sz="1200" b="1" i="0">
                 <a:solidFill>
                   <a:srgbClr val="FFFFFF"/>
                 </a:solidFill>
                 <a:latin typeface="Calibri"/>
               </a:rPr>
-              <a:t>НЕМЕДЛЕННО</a:t>
-            </a:r>
-          </a:p>
-        </p:txBody>
-      </p:sp>
-      <p:sp>
-        <p:nvSpPr>
-          <p:cNvPr id="10" name="TextBox 9"/>
-          <p:cNvSpPr txBox="1"/>
-          <p:nvPr/>
-        </p:nvSpPr>
-        <p:spPr>
-          <a:xfrm>
-            <a:off x="457200" y="1691640"/>
-            <a:ext cx="11247120" cy="1371600"/>
-          </a:xfrm>
-          <a:prstGeom prst="rect">
-            <a:avLst/>
-          </a:prstGeom>
-          <a:noFill/>
-        </p:spPr>
-        <p:txBody>
-          <a:bodyPr wrap="square" anchor="t">
-            <a:spAutoFit/>
-          </a:bodyPr>
-          <a:lstStyle/>
-          <a:p>
-            <a:pPr algn="l"/>
-            <a:r>
-              <a:rPr sz="1300" b="0" i="0">
+              <a:t>Пункт</a:t>
+            </a:r>
+          </a:p>
+        </p:txBody>
+      </p:sp>
+      <p:sp>
+        <p:nvSpPr>
+          <p:cNvPr id="10" name="Rectangle 9"/>
+          <p:cNvSpPr/>
+          <p:nvPr/>
+        </p:nvSpPr>
+        <p:spPr>
+          <a:xfrm>
+            <a:off x="457200" y="1874519"/>
+            <a:ext cx="6764731" cy="502920"/>
+          </a:xfrm>
+          <a:prstGeom prst="rect">
+            <a:avLst/>
+          </a:prstGeom>
+          <a:solidFill>
+            <a:srgbClr val="FFFFFF"/>
+          </a:solidFill>
+          <a:ln>
+            <a:noFill/>
+          </a:ln>
+          <a:effectLst/>
+        </p:spPr>
+        <p:style>
+          <a:lnRef idx="1">
+            <a:schemeClr val="accent1"/>
+          </a:lnRef>
+          <a:fillRef idx="3">
+            <a:schemeClr val="accent1"/>
+          </a:fillRef>
+          <a:effectRef idx="2">
+            <a:schemeClr val="accent1"/>
+          </a:effectRef>
+          <a:fontRef idx="minor">
+            <a:schemeClr val="lt1"/>
+          </a:fontRef>
+        </p:style>
+        <p:txBody>
+          <a:bodyPr rtlCol="0" anchor="ctr"/>
+          <a:lstStyle/>
+          <a:p>
+            <a:pPr algn="ctr"/>
+          </a:p>
+        </p:txBody>
+      </p:sp>
+      <p:sp>
+        <p:nvSpPr>
+          <p:cNvPr id="11" name="TextBox 10"/>
+          <p:cNvSpPr txBox="1"/>
+          <p:nvPr/>
+        </p:nvSpPr>
+        <p:spPr>
+          <a:xfrm>
+            <a:off x="512064" y="1892807"/>
+            <a:ext cx="6673291" cy="484632"/>
+          </a:xfrm>
+          <a:prstGeom prst="rect">
+            <a:avLst/>
+          </a:prstGeom>
+          <a:noFill/>
+        </p:spPr>
+        <p:txBody>
+          <a:bodyPr wrap="square" anchor="ctr">
+            <a:spAutoFit/>
+          </a:bodyPr>
+          <a:lstStyle/>
+          <a:p>
+            <a:pPr algn="l"/>
+            <a:r>
+              <a:rPr sz="1200" b="0" i="0">
                 <a:solidFill>
                   <a:srgbClr val="293136"/>
                 </a:solidFill>
                 <a:latin typeface="Calibri"/>
               </a:rPr>
-              <a:t>• Перекалибровать ЭБУ NTE200 под профиль 730E: TIB 100%, включить защиту по T масла и триггеры перегрева, убрать задержки derate, снизить max обороты до 1990.</a:t>
-            </a:r>
-          </a:p>
-          <a:p>
-            <a:pPr algn="l"/>
-            <a:r>
-              <a:rPr sz="1300" b="0" i="0">
+              <a:t>Даты ремонтов #47, #48</a:t>
+            </a:r>
+          </a:p>
+        </p:txBody>
+      </p:sp>
+      <p:sp>
+        <p:nvSpPr>
+          <p:cNvPr id="12" name="Rectangle 11"/>
+          <p:cNvSpPr/>
+          <p:nvPr/>
+        </p:nvSpPr>
+        <p:spPr>
+          <a:xfrm>
+            <a:off x="457200" y="2377439"/>
+            <a:ext cx="6764731" cy="502920"/>
+          </a:xfrm>
+          <a:prstGeom prst="rect">
+            <a:avLst/>
+          </a:prstGeom>
+          <a:solidFill>
+            <a:srgbClr val="ECEFF1"/>
+          </a:solidFill>
+          <a:ln>
+            <a:noFill/>
+          </a:ln>
+          <a:effectLst/>
+        </p:spPr>
+        <p:style>
+          <a:lnRef idx="1">
+            <a:schemeClr val="accent1"/>
+          </a:lnRef>
+          <a:fillRef idx="3">
+            <a:schemeClr val="accent1"/>
+          </a:fillRef>
+          <a:effectRef idx="2">
+            <a:schemeClr val="accent1"/>
+          </a:effectRef>
+          <a:fontRef idx="minor">
+            <a:schemeClr val="lt1"/>
+          </a:fontRef>
+        </p:style>
+        <p:txBody>
+          <a:bodyPr rtlCol="0" anchor="ctr"/>
+          <a:lstStyle/>
+          <a:p>
+            <a:pPr algn="ctr"/>
+          </a:p>
+        </p:txBody>
+      </p:sp>
+      <p:sp>
+        <p:nvSpPr>
+          <p:cNvPr id="13" name="TextBox 12"/>
+          <p:cNvSpPr txBox="1"/>
+          <p:nvPr/>
+        </p:nvSpPr>
+        <p:spPr>
+          <a:xfrm>
+            <a:off x="512064" y="2395727"/>
+            <a:ext cx="6673291" cy="484632"/>
+          </a:xfrm>
+          <a:prstGeom prst="rect">
+            <a:avLst/>
+          </a:prstGeom>
+          <a:noFill/>
+        </p:spPr>
+        <p:txBody>
+          <a:bodyPr wrap="square" anchor="ctr">
+            <a:spAutoFit/>
+          </a:bodyPr>
+          <a:lstStyle/>
+          <a:p>
+            <a:pPr algn="l"/>
+            <a:r>
+              <a:rPr sz="1200" b="0" i="0">
                 <a:solidFill>
                   <a:srgbClr val="293136"/>
                 </a:solidFill>
                 <a:latin typeface="Calibri"/>
               </a:rPr>
-              <a:t>• Контрольный DML после перекалибровки — подтвердить снижение EGT.</a:t>
-            </a:r>
-          </a:p>
-          <a:p>
-            <a:pPr algn="l"/>
-            <a:r>
-              <a:rPr sz="1300" b="0" i="0">
+              <a:t>Счёт ремонтов («30/24+» vs ~13)</a:t>
+            </a:r>
+          </a:p>
+        </p:txBody>
+      </p:sp>
+      <p:sp>
+        <p:nvSpPr>
+          <p:cNvPr id="14" name="Rectangle 13"/>
+          <p:cNvSpPr/>
+          <p:nvPr/>
+        </p:nvSpPr>
+        <p:spPr>
+          <a:xfrm>
+            <a:off x="457200" y="2880359"/>
+            <a:ext cx="6764731" cy="502920"/>
+          </a:xfrm>
+          <a:prstGeom prst="rect">
+            <a:avLst/>
+          </a:prstGeom>
+          <a:solidFill>
+            <a:srgbClr val="FFFFFF"/>
+          </a:solidFill>
+          <a:ln>
+            <a:noFill/>
+          </a:ln>
+          <a:effectLst/>
+        </p:spPr>
+        <p:style>
+          <a:lnRef idx="1">
+            <a:schemeClr val="accent1"/>
+          </a:lnRef>
+          <a:fillRef idx="3">
+            <a:schemeClr val="accent1"/>
+          </a:fillRef>
+          <a:effectRef idx="2">
+            <a:schemeClr val="accent1"/>
+          </a:effectRef>
+          <a:fontRef idx="minor">
+            <a:schemeClr val="lt1"/>
+          </a:fontRef>
+        </p:style>
+        <p:txBody>
+          <a:bodyPr rtlCol="0" anchor="ctr"/>
+          <a:lstStyle/>
+          <a:p>
+            <a:pPr algn="ctr"/>
+          </a:p>
+        </p:txBody>
+      </p:sp>
+      <p:sp>
+        <p:nvSpPr>
+          <p:cNvPr id="15" name="TextBox 14"/>
+          <p:cNvSpPr txBox="1"/>
+          <p:nvPr/>
+        </p:nvSpPr>
+        <p:spPr>
+          <a:xfrm>
+            <a:off x="512064" y="2898647"/>
+            <a:ext cx="6673291" cy="484632"/>
+          </a:xfrm>
+          <a:prstGeom prst="rect">
+            <a:avLst/>
+          </a:prstGeom>
+          <a:noFill/>
+        </p:spPr>
+        <p:txBody>
+          <a:bodyPr wrap="square" anchor="ctr">
+            <a:spAutoFit/>
+          </a:bodyPr>
+          <a:lstStyle/>
+          <a:p>
+            <a:pPr algn="l"/>
+            <a:r>
+              <a:rPr sz="1200" b="0" i="0">
                 <a:solidFill>
                   <a:srgbClr val="293136"/>
                 </a:solidFill>
                 <a:latin typeface="Calibri"/>
               </a:rPr>
-              <a:t>• Заменить датчики EGT с FC1531/1619 (#82, #67).</a:t>
-            </a:r>
-          </a:p>
-        </p:txBody>
-      </p:sp>
-      <p:sp>
-        <p:nvSpPr>
-          <p:cNvPr id="11" name="Rectangle 10"/>
-          <p:cNvSpPr/>
-          <p:nvPr/>
-        </p:nvSpPr>
-        <p:spPr>
-          <a:xfrm>
-            <a:off x="457200" y="3200400"/>
-            <a:ext cx="2377440" cy="310896"/>
-          </a:xfrm>
-          <a:prstGeom prst="rect">
-            <a:avLst/>
-          </a:prstGeom>
-          <a:solidFill>
-            <a:srgbClr val="E08C2E"/>
-          </a:solidFill>
-          <a:ln>
-            <a:noFill/>
-          </a:ln>
-          <a:effectLst/>
-        </p:spPr>
-        <p:style>
-          <a:lnRef idx="1">
-            <a:schemeClr val="accent1"/>
-          </a:lnRef>
-          <a:fillRef idx="3">
-            <a:schemeClr val="accent1"/>
-          </a:fillRef>
-          <a:effectRef idx="2">
-            <a:schemeClr val="accent1"/>
-          </a:effectRef>
-          <a:fontRef idx="minor">
-            <a:schemeClr val="lt1"/>
-          </a:fontRef>
-        </p:style>
-        <p:txBody>
-          <a:bodyPr rtlCol="0" anchor="ctr"/>
-          <a:lstStyle/>
-          <a:p>
-            <a:pPr algn="ctr"/>
-          </a:p>
-        </p:txBody>
-      </p:sp>
-      <p:sp>
-        <p:nvSpPr>
-          <p:cNvPr id="12" name="TextBox 11"/>
-          <p:cNvSpPr txBox="1"/>
-          <p:nvPr/>
-        </p:nvSpPr>
-        <p:spPr>
-          <a:xfrm>
-            <a:off x="530352" y="3227832"/>
-            <a:ext cx="2267712" cy="274320"/>
-          </a:xfrm>
-          <a:prstGeom prst="rect">
-            <a:avLst/>
-          </a:prstGeom>
-          <a:noFill/>
-        </p:spPr>
-        <p:txBody>
-          <a:bodyPr wrap="square" anchor="t">
-            <a:spAutoFit/>
-          </a:bodyPr>
-          <a:lstStyle/>
-          <a:p>
-            <a:pPr algn="l"/>
-            <a:r>
-              <a:rPr sz="1100" b="1" i="0">
+              <a:t>«0 отказов 730E»</a:t>
+            </a:r>
+          </a:p>
+        </p:txBody>
+      </p:sp>
+      <p:sp>
+        <p:nvSpPr>
+          <p:cNvPr id="16" name="Rectangle 15"/>
+          <p:cNvSpPr/>
+          <p:nvPr/>
+        </p:nvSpPr>
+        <p:spPr>
+          <a:xfrm>
+            <a:off x="457200" y="3383279"/>
+            <a:ext cx="6764731" cy="502920"/>
+          </a:xfrm>
+          <a:prstGeom prst="rect">
+            <a:avLst/>
+          </a:prstGeom>
+          <a:solidFill>
+            <a:srgbClr val="ECEFF1"/>
+          </a:solidFill>
+          <a:ln>
+            <a:noFill/>
+          </a:ln>
+          <a:effectLst/>
+        </p:spPr>
+        <p:style>
+          <a:lnRef idx="1">
+            <a:schemeClr val="accent1"/>
+          </a:lnRef>
+          <a:fillRef idx="3">
+            <a:schemeClr val="accent1"/>
+          </a:fillRef>
+          <a:effectRef idx="2">
+            <a:schemeClr val="accent1"/>
+          </a:effectRef>
+          <a:fontRef idx="minor">
+            <a:schemeClr val="lt1"/>
+          </a:fontRef>
+        </p:style>
+        <p:txBody>
+          <a:bodyPr rtlCol="0" anchor="ctr"/>
+          <a:lstStyle/>
+          <a:p>
+            <a:pPr algn="ctr"/>
+          </a:p>
+        </p:txBody>
+      </p:sp>
+      <p:sp>
+        <p:nvSpPr>
+          <p:cNvPr id="17" name="TextBox 16"/>
+          <p:cNvSpPr txBox="1"/>
+          <p:nvPr/>
+        </p:nvSpPr>
+        <p:spPr>
+          <a:xfrm>
+            <a:off x="512064" y="3401567"/>
+            <a:ext cx="6673291" cy="484632"/>
+          </a:xfrm>
+          <a:prstGeom prst="rect">
+            <a:avLst/>
+          </a:prstGeom>
+          <a:noFill/>
+        </p:spPr>
+        <p:txBody>
+          <a:bodyPr wrap="square" anchor="ctr">
+            <a:spAutoFit/>
+          </a:bodyPr>
+          <a:lstStyle/>
+          <a:p>
+            <a:pPr algn="l"/>
+            <a:r>
+              <a:rPr sz="1200" b="0" i="0">
+                <a:solidFill>
+                  <a:srgbClr val="293136"/>
+                </a:solidFill>
+                <a:latin typeface="Calibri"/>
+              </a:rPr>
+              <a:t>Цитаты Cummins 378-010/011, лимит 520 °C</a:t>
+            </a:r>
+          </a:p>
+        </p:txBody>
+      </p:sp>
+      <p:sp>
+        <p:nvSpPr>
+          <p:cNvPr id="18" name="Rectangle 17"/>
+          <p:cNvSpPr/>
+          <p:nvPr/>
+        </p:nvSpPr>
+        <p:spPr>
+          <a:xfrm>
+            <a:off x="457200" y="3886199"/>
+            <a:ext cx="6764731" cy="502920"/>
+          </a:xfrm>
+          <a:prstGeom prst="rect">
+            <a:avLst/>
+          </a:prstGeom>
+          <a:solidFill>
+            <a:srgbClr val="FFFFFF"/>
+          </a:solidFill>
+          <a:ln>
+            <a:noFill/>
+          </a:ln>
+          <a:effectLst/>
+        </p:spPr>
+        <p:style>
+          <a:lnRef idx="1">
+            <a:schemeClr val="accent1"/>
+          </a:lnRef>
+          <a:fillRef idx="3">
+            <a:schemeClr val="accent1"/>
+          </a:fillRef>
+          <a:effectRef idx="2">
+            <a:schemeClr val="accent1"/>
+          </a:effectRef>
+          <a:fontRef idx="minor">
+            <a:schemeClr val="lt1"/>
+          </a:fontRef>
+        </p:style>
+        <p:txBody>
+          <a:bodyPr rtlCol="0" anchor="ctr"/>
+          <a:lstStyle/>
+          <a:p>
+            <a:pPr algn="ctr"/>
+          </a:p>
+        </p:txBody>
+      </p:sp>
+      <p:sp>
+        <p:nvSpPr>
+          <p:cNvPr id="19" name="TextBox 18"/>
+          <p:cNvSpPr txBox="1"/>
+          <p:nvPr/>
+        </p:nvSpPr>
+        <p:spPr>
+          <a:xfrm>
+            <a:off x="512064" y="3904487"/>
+            <a:ext cx="6673291" cy="484632"/>
+          </a:xfrm>
+          <a:prstGeom prst="rect">
+            <a:avLst/>
+          </a:prstGeom>
+          <a:noFill/>
+        </p:spPr>
+        <p:txBody>
+          <a:bodyPr wrap="square" anchor="ctr">
+            <a:spAutoFit/>
+          </a:bodyPr>
+          <a:lstStyle/>
+          <a:p>
+            <a:pPr algn="l"/>
+            <a:r>
+              <a:rPr sz="1200" b="0" i="0">
+                <a:solidFill>
+                  <a:srgbClr val="293136"/>
+                </a:solidFill>
+                <a:latin typeface="Calibri"/>
+              </a:rPr>
+              <a:t>EGT 567 (#82 DML) vs 329 (#83 INSITE)</a:t>
+            </a:r>
+          </a:p>
+        </p:txBody>
+      </p:sp>
+      <p:sp>
+        <p:nvSpPr>
+          <p:cNvPr id="20" name="Rectangle 19"/>
+          <p:cNvSpPr/>
+          <p:nvPr/>
+        </p:nvSpPr>
+        <p:spPr>
+          <a:xfrm>
+            <a:off x="457200" y="4389119"/>
+            <a:ext cx="6764731" cy="502920"/>
+          </a:xfrm>
+          <a:prstGeom prst="rect">
+            <a:avLst/>
+          </a:prstGeom>
+          <a:solidFill>
+            <a:srgbClr val="ECEFF1"/>
+          </a:solidFill>
+          <a:ln>
+            <a:noFill/>
+          </a:ln>
+          <a:effectLst/>
+        </p:spPr>
+        <p:style>
+          <a:lnRef idx="1">
+            <a:schemeClr val="accent1"/>
+          </a:lnRef>
+          <a:fillRef idx="3">
+            <a:schemeClr val="accent1"/>
+          </a:fillRef>
+          <a:effectRef idx="2">
+            <a:schemeClr val="accent1"/>
+          </a:effectRef>
+          <a:fontRef idx="minor">
+            <a:schemeClr val="lt1"/>
+          </a:fontRef>
+        </p:style>
+        <p:txBody>
+          <a:bodyPr rtlCol="0" anchor="ctr"/>
+          <a:lstStyle/>
+          <a:p>
+            <a:pPr algn="ctr"/>
+          </a:p>
+        </p:txBody>
+      </p:sp>
+      <p:sp>
+        <p:nvSpPr>
+          <p:cNvPr id="21" name="TextBox 20"/>
+          <p:cNvSpPr txBox="1"/>
+          <p:nvPr/>
+        </p:nvSpPr>
+        <p:spPr>
+          <a:xfrm>
+            <a:off x="512064" y="4407407"/>
+            <a:ext cx="6673291" cy="484632"/>
+          </a:xfrm>
+          <a:prstGeom prst="rect">
+            <a:avLst/>
+          </a:prstGeom>
+          <a:noFill/>
+        </p:spPr>
+        <p:txBody>
+          <a:bodyPr wrap="square" anchor="ctr">
+            <a:spAutoFit/>
+          </a:bodyPr>
+          <a:lstStyle/>
+          <a:p>
+            <a:pPr algn="l"/>
+            <a:r>
+              <a:rPr sz="1200" b="0" i="0">
+                <a:solidFill>
+                  <a:srgbClr val="293136"/>
+                </a:solidFill>
+                <a:latin typeface="Calibri"/>
+              </a:rPr>
+              <a:t>Тоннаж 220 т / «295 т»</a:t>
+            </a:r>
+          </a:p>
+        </p:txBody>
+      </p:sp>
+      <p:sp>
+        <p:nvSpPr>
+          <p:cNvPr id="22" name="Rectangle 21"/>
+          <p:cNvSpPr/>
+          <p:nvPr/>
+        </p:nvSpPr>
+        <p:spPr>
+          <a:xfrm>
+            <a:off x="457200" y="4892039"/>
+            <a:ext cx="6764731" cy="502920"/>
+          </a:xfrm>
+          <a:prstGeom prst="rect">
+            <a:avLst/>
+          </a:prstGeom>
+          <a:solidFill>
+            <a:srgbClr val="FFFFFF"/>
+          </a:solidFill>
+          <a:ln>
+            <a:noFill/>
+          </a:ln>
+          <a:effectLst/>
+        </p:spPr>
+        <p:style>
+          <a:lnRef idx="1">
+            <a:schemeClr val="accent1"/>
+          </a:lnRef>
+          <a:fillRef idx="3">
+            <a:schemeClr val="accent1"/>
+          </a:fillRef>
+          <a:effectRef idx="2">
+            <a:schemeClr val="accent1"/>
+          </a:effectRef>
+          <a:fontRef idx="minor">
+            <a:schemeClr val="lt1"/>
+          </a:fontRef>
+        </p:style>
+        <p:txBody>
+          <a:bodyPr rtlCol="0" anchor="ctr"/>
+          <a:lstStyle/>
+          <a:p>
+            <a:pPr algn="ctr"/>
+          </a:p>
+        </p:txBody>
+      </p:sp>
+      <p:sp>
+        <p:nvSpPr>
+          <p:cNvPr id="23" name="TextBox 22"/>
+          <p:cNvSpPr txBox="1"/>
+          <p:nvPr/>
+        </p:nvSpPr>
+        <p:spPr>
+          <a:xfrm>
+            <a:off x="512064" y="4910327"/>
+            <a:ext cx="6673291" cy="484632"/>
+          </a:xfrm>
+          <a:prstGeom prst="rect">
+            <a:avLst/>
+          </a:prstGeom>
+          <a:noFill/>
+        </p:spPr>
+        <p:txBody>
+          <a:bodyPr wrap="square" anchor="ctr">
+            <a:spAutoFit/>
+          </a:bodyPr>
+          <a:lstStyle/>
+          <a:p>
+            <a:pPr algn="l"/>
+            <a:r>
+              <a:rPr sz="1200" b="0" i="0">
+                <a:solidFill>
+                  <a:srgbClr val="293136"/>
+                </a:solidFill>
+                <a:latin typeface="Calibri"/>
+              </a:rPr>
+              <a:t>Период проб масла</a:t>
+            </a:r>
+          </a:p>
+        </p:txBody>
+      </p:sp>
+      <p:sp>
+        <p:nvSpPr>
+          <p:cNvPr id="24" name="Rectangle 23"/>
+          <p:cNvSpPr/>
+          <p:nvPr/>
+        </p:nvSpPr>
+        <p:spPr>
+          <a:xfrm>
+            <a:off x="7221931" y="1371600"/>
+            <a:ext cx="4509820" cy="502920"/>
+          </a:xfrm>
+          <a:prstGeom prst="rect">
+            <a:avLst/>
+          </a:prstGeom>
+          <a:solidFill>
+            <a:srgbClr val="293136"/>
+          </a:solidFill>
+          <a:ln>
+            <a:noFill/>
+          </a:ln>
+          <a:effectLst/>
+        </p:spPr>
+        <p:style>
+          <a:lnRef idx="1">
+            <a:schemeClr val="accent1"/>
+          </a:lnRef>
+          <a:fillRef idx="3">
+            <a:schemeClr val="accent1"/>
+          </a:fillRef>
+          <a:effectRef idx="2">
+            <a:schemeClr val="accent1"/>
+          </a:effectRef>
+          <a:fontRef idx="minor">
+            <a:schemeClr val="lt1"/>
+          </a:fontRef>
+        </p:style>
+        <p:txBody>
+          <a:bodyPr rtlCol="0" anchor="ctr"/>
+          <a:lstStyle/>
+          <a:p>
+            <a:pPr algn="ctr"/>
+          </a:p>
+        </p:txBody>
+      </p:sp>
+      <p:sp>
+        <p:nvSpPr>
+          <p:cNvPr id="25" name="TextBox 24"/>
+          <p:cNvSpPr txBox="1"/>
+          <p:nvPr/>
+        </p:nvSpPr>
+        <p:spPr>
+          <a:xfrm>
+            <a:off x="7276795" y="1389888"/>
+            <a:ext cx="4418380" cy="484632"/>
+          </a:xfrm>
+          <a:prstGeom prst="rect">
+            <a:avLst/>
+          </a:prstGeom>
+          <a:noFill/>
+        </p:spPr>
+        <p:txBody>
+          <a:bodyPr wrap="square" anchor="ctr">
+            <a:spAutoFit/>
+          </a:bodyPr>
+          <a:lstStyle/>
+          <a:p>
+            <a:pPr algn="l"/>
+            <a:r>
+              <a:rPr sz="1200" b="1" i="0">
                 <a:solidFill>
                   <a:srgbClr val="FFFFFF"/>
                 </a:solidFill>
                 <a:latin typeface="Calibri"/>
               </a:rPr>
-              <a:t>СРЕДНЕСРОЧНО</a:t>
-            </a:r>
-          </a:p>
-        </p:txBody>
-      </p:sp>
-      <p:sp>
-        <p:nvSpPr>
-          <p:cNvPr id="13" name="TextBox 12"/>
-          <p:cNvSpPr txBox="1"/>
-          <p:nvPr/>
-        </p:nvSpPr>
-        <p:spPr>
-          <a:xfrm>
-            <a:off x="457200" y="3611880"/>
-            <a:ext cx="11247120" cy="1188720"/>
-          </a:xfrm>
-          <a:prstGeom prst="rect">
-            <a:avLst/>
-          </a:prstGeom>
-          <a:noFill/>
-        </p:spPr>
-        <p:txBody>
-          <a:bodyPr wrap="square" anchor="t">
-            <a:spAutoFit/>
-          </a:bodyPr>
-          <a:lstStyle/>
-          <a:p>
-            <a:pPr algn="l"/>
-            <a:r>
-              <a:rPr sz="1300" b="0" i="0">
+              <a:t>Статус</a:t>
+            </a:r>
+          </a:p>
+        </p:txBody>
+      </p:sp>
+      <p:sp>
+        <p:nvSpPr>
+          <p:cNvPr id="26" name="Rectangle 25"/>
+          <p:cNvSpPr/>
+          <p:nvPr/>
+        </p:nvSpPr>
+        <p:spPr>
+          <a:xfrm>
+            <a:off x="7221931" y="1874519"/>
+            <a:ext cx="4509820" cy="502920"/>
+          </a:xfrm>
+          <a:prstGeom prst="rect">
+            <a:avLst/>
+          </a:prstGeom>
+          <a:solidFill>
+            <a:srgbClr val="FFFFFF"/>
+          </a:solidFill>
+          <a:ln>
+            <a:noFill/>
+          </a:ln>
+          <a:effectLst/>
+        </p:spPr>
+        <p:style>
+          <a:lnRef idx="1">
+            <a:schemeClr val="accent1"/>
+          </a:lnRef>
+          <a:fillRef idx="3">
+            <a:schemeClr val="accent1"/>
+          </a:fillRef>
+          <a:effectRef idx="2">
+            <a:schemeClr val="accent1"/>
+          </a:effectRef>
+          <a:fontRef idx="minor">
+            <a:schemeClr val="lt1"/>
+          </a:fontRef>
+        </p:style>
+        <p:txBody>
+          <a:bodyPr rtlCol="0" anchor="ctr"/>
+          <a:lstStyle/>
+          <a:p>
+            <a:pPr algn="ctr"/>
+          </a:p>
+        </p:txBody>
+      </p:sp>
+      <p:sp>
+        <p:nvSpPr>
+          <p:cNvPr id="27" name="TextBox 26"/>
+          <p:cNvSpPr txBox="1"/>
+          <p:nvPr/>
+        </p:nvSpPr>
+        <p:spPr>
+          <a:xfrm>
+            <a:off x="7276795" y="1892807"/>
+            <a:ext cx="4418380" cy="484632"/>
+          </a:xfrm>
+          <a:prstGeom prst="rect">
+            <a:avLst/>
+          </a:prstGeom>
+          <a:noFill/>
+        </p:spPr>
+        <p:txBody>
+          <a:bodyPr wrap="square" anchor="ctr">
+            <a:spAutoFit/>
+          </a:bodyPr>
+          <a:lstStyle/>
+          <a:p>
+            <a:pPr algn="l"/>
+            <a:r>
+              <a:rPr sz="1200" b="0" i="0">
                 <a:solidFill>
                   <a:srgbClr val="293136"/>
                 </a:solidFill>
                 <a:latin typeface="Calibri"/>
               </a:rPr>
-              <a:t>• Запрос NHL/Cummins: обоснование исключения Stellite и отключения защит; поставка клапанов с наплавкой.</a:t>
-            </a:r>
-          </a:p>
-          <a:p>
-            <a:pPr algn="l"/>
-            <a:r>
-              <a:rPr sz="1300" b="0" i="0">
+              <a:t>❌ расходятся между источниками</a:t>
+            </a:r>
+          </a:p>
+        </p:txBody>
+      </p:sp>
+      <p:sp>
+        <p:nvSpPr>
+          <p:cNvPr id="28" name="Rectangle 27"/>
+          <p:cNvSpPr/>
+          <p:nvPr/>
+        </p:nvSpPr>
+        <p:spPr>
+          <a:xfrm>
+            <a:off x="7221931" y="2377439"/>
+            <a:ext cx="4509820" cy="502920"/>
+          </a:xfrm>
+          <a:prstGeom prst="rect">
+            <a:avLst/>
+          </a:prstGeom>
+          <a:solidFill>
+            <a:srgbClr val="ECEFF1"/>
+          </a:solidFill>
+          <a:ln>
+            <a:noFill/>
+          </a:ln>
+          <a:effectLst/>
+        </p:spPr>
+        <p:style>
+          <a:lnRef idx="1">
+            <a:schemeClr val="accent1"/>
+          </a:lnRef>
+          <a:fillRef idx="3">
+            <a:schemeClr val="accent1"/>
+          </a:fillRef>
+          <a:effectRef idx="2">
+            <a:schemeClr val="accent1"/>
+          </a:effectRef>
+          <a:fontRef idx="minor">
+            <a:schemeClr val="lt1"/>
+          </a:fontRef>
+        </p:style>
+        <p:txBody>
+          <a:bodyPr rtlCol="0" anchor="ctr"/>
+          <a:lstStyle/>
+          <a:p>
+            <a:pPr algn="ctr"/>
+          </a:p>
+        </p:txBody>
+      </p:sp>
+      <p:sp>
+        <p:nvSpPr>
+          <p:cNvPr id="29" name="TextBox 28"/>
+          <p:cNvSpPr txBox="1"/>
+          <p:nvPr/>
+        </p:nvSpPr>
+        <p:spPr>
+          <a:xfrm>
+            <a:off x="7276795" y="2395727"/>
+            <a:ext cx="4418380" cy="484632"/>
+          </a:xfrm>
+          <a:prstGeom prst="rect">
+            <a:avLst/>
+          </a:prstGeom>
+          <a:noFill/>
+        </p:spPr>
+        <p:txBody>
+          <a:bodyPr wrap="square" anchor="ctr">
+            <a:spAutoFit/>
+          </a:bodyPr>
+          <a:lstStyle/>
+          <a:p>
+            <a:pPr algn="l"/>
+            <a:r>
+              <a:rPr sz="1200" b="0" i="0">
                 <a:solidFill>
                   <a:srgbClr val="293136"/>
                 </a:solidFill>
                 <a:latin typeface="Calibri"/>
               </a:rPr>
-              <a:t>• Унифицировать прошивку ЭБУ (.07/.08).</a:t>
-            </a:r>
-          </a:p>
-          <a:p>
-            <a:pPr algn="l"/>
-            <a:r>
-              <a:rPr sz="1300" b="0" i="0">
+              <a:t>❌ прежняя оценка завышена</a:t>
+            </a:r>
+          </a:p>
+        </p:txBody>
+      </p:sp>
+      <p:sp>
+        <p:nvSpPr>
+          <p:cNvPr id="30" name="Rectangle 29"/>
+          <p:cNvSpPr/>
+          <p:nvPr/>
+        </p:nvSpPr>
+        <p:spPr>
+          <a:xfrm>
+            <a:off x="7221931" y="2880359"/>
+            <a:ext cx="4509820" cy="502920"/>
+          </a:xfrm>
+          <a:prstGeom prst="rect">
+            <a:avLst/>
+          </a:prstGeom>
+          <a:solidFill>
+            <a:srgbClr val="FFFFFF"/>
+          </a:solidFill>
+          <a:ln>
+            <a:noFill/>
+          </a:ln>
+          <a:effectLst/>
+        </p:spPr>
+        <p:style>
+          <a:lnRef idx="1">
+            <a:schemeClr val="accent1"/>
+          </a:lnRef>
+          <a:fillRef idx="3">
+            <a:schemeClr val="accent1"/>
+          </a:fillRef>
+          <a:effectRef idx="2">
+            <a:schemeClr val="accent1"/>
+          </a:effectRef>
+          <a:fontRef idx="minor">
+            <a:schemeClr val="lt1"/>
+          </a:fontRef>
+        </p:style>
+        <p:txBody>
+          <a:bodyPr rtlCol="0" anchor="ctr"/>
+          <a:lstStyle/>
+          <a:p>
+            <a:pPr algn="ctr"/>
+          </a:p>
+        </p:txBody>
+      </p:sp>
+      <p:sp>
+        <p:nvSpPr>
+          <p:cNvPr id="31" name="TextBox 30"/>
+          <p:cNvSpPr txBox="1"/>
+          <p:nvPr/>
+        </p:nvSpPr>
+        <p:spPr>
+          <a:xfrm>
+            <a:off x="7276795" y="2898647"/>
+            <a:ext cx="4418380" cy="484632"/>
+          </a:xfrm>
+          <a:prstGeom prst="rect">
+            <a:avLst/>
+          </a:prstGeom>
+          <a:noFill/>
+        </p:spPr>
+        <p:txBody>
+          <a:bodyPr wrap="square" anchor="ctr">
+            <a:spAutoFit/>
+          </a:bodyPr>
+          <a:lstStyle/>
+          <a:p>
+            <a:pPr algn="l"/>
+            <a:r>
+              <a:rPr sz="1200" b="0" i="0">
                 <a:solidFill>
                   <a:srgbClr val="293136"/>
                 </a:solidFill>
                 <a:latin typeface="Calibri"/>
               </a:rPr>
-              <a:t>• Сопоставить FC611/EGT-коды с историей ремонтов.</a:t>
-            </a:r>
-          </a:p>
-        </p:txBody>
-      </p:sp>
-      <p:sp>
-        <p:nvSpPr>
-          <p:cNvPr id="14" name="Rectangle 13"/>
-          <p:cNvSpPr/>
-          <p:nvPr/>
-        </p:nvSpPr>
-        <p:spPr>
-          <a:xfrm>
-            <a:off x="457200" y="4846320"/>
-            <a:ext cx="2194560" cy="310896"/>
-          </a:xfrm>
-          <a:prstGeom prst="rect">
-            <a:avLst/>
-          </a:prstGeom>
-          <a:solidFill>
-            <a:srgbClr val="2EA043"/>
-          </a:solidFill>
-          <a:ln>
-            <a:noFill/>
-          </a:ln>
-          <a:effectLst/>
-        </p:spPr>
-        <p:style>
-          <a:lnRef idx="1">
-            <a:schemeClr val="accent1"/>
-          </a:lnRef>
-          <a:fillRef idx="3">
-            <a:schemeClr val="accent1"/>
-          </a:fillRef>
-          <a:effectRef idx="2">
-            <a:schemeClr val="accent1"/>
-          </a:effectRef>
-          <a:fontRef idx="minor">
-            <a:schemeClr val="lt1"/>
-          </a:fontRef>
-        </p:style>
-        <p:txBody>
-          <a:bodyPr rtlCol="0" anchor="ctr"/>
-          <a:lstStyle/>
-          <a:p>
-            <a:pPr algn="ctr"/>
-          </a:p>
-        </p:txBody>
-      </p:sp>
-      <p:sp>
-        <p:nvSpPr>
-          <p:cNvPr id="15" name="TextBox 14"/>
-          <p:cNvSpPr txBox="1"/>
-          <p:nvPr/>
-        </p:nvSpPr>
-        <p:spPr>
-          <a:xfrm>
-            <a:off x="530352" y="4873752"/>
-            <a:ext cx="2084831" cy="274320"/>
-          </a:xfrm>
-          <a:prstGeom prst="rect">
-            <a:avLst/>
-          </a:prstGeom>
-          <a:noFill/>
-        </p:spPr>
-        <p:txBody>
-          <a:bodyPr wrap="square" anchor="t">
-            <a:spAutoFit/>
-          </a:bodyPr>
-          <a:lstStyle/>
-          <a:p>
-            <a:pPr algn="l"/>
-            <a:r>
-              <a:rPr sz="1100" b="1" i="0">
-                <a:solidFill>
-                  <a:srgbClr val="FFFFFF"/>
-                </a:solidFill>
-                <a:latin typeface="Calibri"/>
-              </a:rPr>
-              <a:t>ДОЛГОСРОЧНО</a:t>
-            </a:r>
-          </a:p>
-        </p:txBody>
-      </p:sp>
-      <p:sp>
-        <p:nvSpPr>
-          <p:cNvPr id="16" name="TextBox 15"/>
-          <p:cNvSpPr txBox="1"/>
-          <p:nvPr/>
-        </p:nvSpPr>
-        <p:spPr>
-          <a:xfrm>
-            <a:off x="457200" y="5257800"/>
-            <a:ext cx="11247120" cy="914400"/>
-          </a:xfrm>
-          <a:prstGeom prst="rect">
-            <a:avLst/>
-          </a:prstGeom>
-          <a:noFill/>
-        </p:spPr>
-        <p:txBody>
-          <a:bodyPr wrap="square" anchor="t">
-            <a:spAutoFit/>
-          </a:bodyPr>
-          <a:lstStyle/>
-          <a:p>
-            <a:pPr algn="l"/>
-            <a:r>
-              <a:rPr sz="1300" b="0" i="0">
+              <a:t>⚠️ нет полного реестра ремонтов 730E</a:t>
+            </a:r>
+          </a:p>
+        </p:txBody>
+      </p:sp>
+      <p:sp>
+        <p:nvSpPr>
+          <p:cNvPr id="32" name="Rectangle 31"/>
+          <p:cNvSpPr/>
+          <p:nvPr/>
+        </p:nvSpPr>
+        <p:spPr>
+          <a:xfrm>
+            <a:off x="7221931" y="3383279"/>
+            <a:ext cx="4509820" cy="502920"/>
+          </a:xfrm>
+          <a:prstGeom prst="rect">
+            <a:avLst/>
+          </a:prstGeom>
+          <a:solidFill>
+            <a:srgbClr val="ECEFF1"/>
+          </a:solidFill>
+          <a:ln>
+            <a:noFill/>
+          </a:ln>
+          <a:effectLst/>
+        </p:spPr>
+        <p:style>
+          <a:lnRef idx="1">
+            <a:schemeClr val="accent1"/>
+          </a:lnRef>
+          <a:fillRef idx="3">
+            <a:schemeClr val="accent1"/>
+          </a:fillRef>
+          <a:effectRef idx="2">
+            <a:schemeClr val="accent1"/>
+          </a:effectRef>
+          <a:fontRef idx="minor">
+            <a:schemeClr val="lt1"/>
+          </a:fontRef>
+        </p:style>
+        <p:txBody>
+          <a:bodyPr rtlCol="0" anchor="ctr"/>
+          <a:lstStyle/>
+          <a:p>
+            <a:pPr algn="ctr"/>
+          </a:p>
+        </p:txBody>
+      </p:sp>
+      <p:sp>
+        <p:nvSpPr>
+          <p:cNvPr id="33" name="TextBox 32"/>
+          <p:cNvSpPr txBox="1"/>
+          <p:nvPr/>
+        </p:nvSpPr>
+        <p:spPr>
+          <a:xfrm>
+            <a:off x="7276795" y="3401567"/>
+            <a:ext cx="4418380" cy="484632"/>
+          </a:xfrm>
+          <a:prstGeom prst="rect">
+            <a:avLst/>
+          </a:prstGeom>
+          <a:noFill/>
+        </p:spPr>
+        <p:txBody>
+          <a:bodyPr wrap="square" anchor="ctr">
+            <a:spAutoFit/>
+          </a:bodyPr>
+          <a:lstStyle/>
+          <a:p>
+            <a:pPr algn="l"/>
+            <a:r>
+              <a:rPr sz="1200" b="0" i="0">
                 <a:solidFill>
                   <a:srgbClr val="293136"/>
                 </a:solidFill>
                 <a:latin typeface="Calibri"/>
               </a:rPr>
-              <a:t>• Мониторинг EGT и FC611 в реальном времени.</a:t>
-            </a:r>
-          </a:p>
-          <a:p>
-            <a:pPr algn="l"/>
-            <a:r>
-              <a:rPr sz="1300" b="0" i="0">
+              <a:t>⚠️ без дословного первоисточника</a:t>
+            </a:r>
+          </a:p>
+        </p:txBody>
+      </p:sp>
+      <p:sp>
+        <p:nvSpPr>
+          <p:cNvPr id="34" name="Rectangle 33"/>
+          <p:cNvSpPr/>
+          <p:nvPr/>
+        </p:nvSpPr>
+        <p:spPr>
+          <a:xfrm>
+            <a:off x="7221931" y="3886199"/>
+            <a:ext cx="4509820" cy="502920"/>
+          </a:xfrm>
+          <a:prstGeom prst="rect">
+            <a:avLst/>
+          </a:prstGeom>
+          <a:solidFill>
+            <a:srgbClr val="FFFFFF"/>
+          </a:solidFill>
+          <a:ln>
+            <a:noFill/>
+          </a:ln>
+          <a:effectLst/>
+        </p:spPr>
+        <p:style>
+          <a:lnRef idx="1">
+            <a:schemeClr val="accent1"/>
+          </a:lnRef>
+          <a:fillRef idx="3">
+            <a:schemeClr val="accent1"/>
+          </a:fillRef>
+          <a:effectRef idx="2">
+            <a:schemeClr val="accent1"/>
+          </a:effectRef>
+          <a:fontRef idx="minor">
+            <a:schemeClr val="lt1"/>
+          </a:fontRef>
+        </p:style>
+        <p:txBody>
+          <a:bodyPr rtlCol="0" anchor="ctr"/>
+          <a:lstStyle/>
+          <a:p>
+            <a:pPr algn="ctr"/>
+          </a:p>
+        </p:txBody>
+      </p:sp>
+      <p:sp>
+        <p:nvSpPr>
+          <p:cNvPr id="35" name="TextBox 34"/>
+          <p:cNvSpPr txBox="1"/>
+          <p:nvPr/>
+        </p:nvSpPr>
+        <p:spPr>
+          <a:xfrm>
+            <a:off x="7276795" y="3904487"/>
+            <a:ext cx="4418380" cy="484632"/>
+          </a:xfrm>
+          <a:prstGeom prst="rect">
+            <a:avLst/>
+          </a:prstGeom>
+          <a:noFill/>
+        </p:spPr>
+        <p:txBody>
+          <a:bodyPr wrap="square" anchor="ctr">
+            <a:spAutoFit/>
+          </a:bodyPr>
+          <a:lstStyle/>
+          <a:p>
+            <a:pPr algn="l"/>
+            <a:r>
+              <a:rPr sz="1200" b="0" i="0">
                 <a:solidFill>
                   <a:srgbClr val="293136"/>
                 </a:solidFill>
                 <a:latin typeface="Calibri"/>
               </a:rPr>
-              <a:t>• Устранить нарушение по паспорту топлива №246.</a:t>
-            </a:r>
-          </a:p>
-        </p:txBody>
-      </p:sp>
-      <p:sp>
-        <p:nvSpPr>
-          <p:cNvPr id="17" name="Rectangle 16"/>
+              <a:t>⚠️ разные машины/условия</a:t>
+            </a:r>
+          </a:p>
+        </p:txBody>
+      </p:sp>
+      <p:sp>
+        <p:nvSpPr>
+          <p:cNvPr id="36" name="Rectangle 35"/>
+          <p:cNvSpPr/>
+          <p:nvPr/>
+        </p:nvSpPr>
+        <p:spPr>
+          <a:xfrm>
+            <a:off x="7221931" y="4389119"/>
+            <a:ext cx="4509820" cy="502920"/>
+          </a:xfrm>
+          <a:prstGeom prst="rect">
+            <a:avLst/>
+          </a:prstGeom>
+          <a:solidFill>
+            <a:srgbClr val="ECEFF1"/>
+          </a:solidFill>
+          <a:ln>
+            <a:noFill/>
+          </a:ln>
+          <a:effectLst/>
+        </p:spPr>
+        <p:style>
+          <a:lnRef idx="1">
+            <a:schemeClr val="accent1"/>
+          </a:lnRef>
+          <a:fillRef idx="3">
+            <a:schemeClr val="accent1"/>
+          </a:fillRef>
+          <a:effectRef idx="2">
+            <a:schemeClr val="accent1"/>
+          </a:effectRef>
+          <a:fontRef idx="minor">
+            <a:schemeClr val="lt1"/>
+          </a:fontRef>
+        </p:style>
+        <p:txBody>
+          <a:bodyPr rtlCol="0" anchor="ctr"/>
+          <a:lstStyle/>
+          <a:p>
+            <a:pPr algn="ctr"/>
+          </a:p>
+        </p:txBody>
+      </p:sp>
+      <p:sp>
+        <p:nvSpPr>
+          <p:cNvPr id="37" name="TextBox 36"/>
+          <p:cNvSpPr txBox="1"/>
+          <p:nvPr/>
+        </p:nvSpPr>
+        <p:spPr>
+          <a:xfrm>
+            <a:off x="7276795" y="4407407"/>
+            <a:ext cx="4418380" cy="484632"/>
+          </a:xfrm>
+          <a:prstGeom prst="rect">
+            <a:avLst/>
+          </a:prstGeom>
+          <a:noFill/>
+        </p:spPr>
+        <p:txBody>
+          <a:bodyPr wrap="square" anchor="ctr">
+            <a:spAutoFit/>
+          </a:bodyPr>
+          <a:lstStyle/>
+          <a:p>
+            <a:pPr algn="l"/>
+            <a:r>
+              <a:rPr sz="1200" b="0" i="0">
+                <a:solidFill>
+                  <a:srgbClr val="293136"/>
+                </a:solidFill>
+                <a:latin typeface="Calibri"/>
+              </a:rPr>
+              <a:t>❌ исправлено на 180 т (239 т)</a:t>
+            </a:r>
+          </a:p>
+        </p:txBody>
+      </p:sp>
+      <p:sp>
+        <p:nvSpPr>
+          <p:cNvPr id="38" name="Rectangle 37"/>
+          <p:cNvSpPr/>
+          <p:nvPr/>
+        </p:nvSpPr>
+        <p:spPr>
+          <a:xfrm>
+            <a:off x="7221931" y="4892039"/>
+            <a:ext cx="4509820" cy="502920"/>
+          </a:xfrm>
+          <a:prstGeom prst="rect">
+            <a:avLst/>
+          </a:prstGeom>
+          <a:solidFill>
+            <a:srgbClr val="FFFFFF"/>
+          </a:solidFill>
+          <a:ln>
+            <a:noFill/>
+          </a:ln>
+          <a:effectLst/>
+        </p:spPr>
+        <p:style>
+          <a:lnRef idx="1">
+            <a:schemeClr val="accent1"/>
+          </a:lnRef>
+          <a:fillRef idx="3">
+            <a:schemeClr val="accent1"/>
+          </a:fillRef>
+          <a:effectRef idx="2">
+            <a:schemeClr val="accent1"/>
+          </a:effectRef>
+          <a:fontRef idx="minor">
+            <a:schemeClr val="lt1"/>
+          </a:fontRef>
+        </p:style>
+        <p:txBody>
+          <a:bodyPr rtlCol="0" anchor="ctr"/>
+          <a:lstStyle/>
+          <a:p>
+            <a:pPr algn="ctr"/>
+          </a:p>
+        </p:txBody>
+      </p:sp>
+      <p:sp>
+        <p:nvSpPr>
+          <p:cNvPr id="39" name="TextBox 38"/>
+          <p:cNvSpPr txBox="1"/>
+          <p:nvPr/>
+        </p:nvSpPr>
+        <p:spPr>
+          <a:xfrm>
+            <a:off x="7276795" y="4910327"/>
+            <a:ext cx="4418380" cy="484632"/>
+          </a:xfrm>
+          <a:prstGeom prst="rect">
+            <a:avLst/>
+          </a:prstGeom>
+          <a:noFill/>
+        </p:spPr>
+        <p:txBody>
+          <a:bodyPr wrap="square" anchor="ctr">
+            <a:spAutoFit/>
+          </a:bodyPr>
+          <a:lstStyle/>
+          <a:p>
+            <a:pPr algn="l"/>
+            <a:r>
+              <a:rPr sz="1200" b="0" i="0">
+                <a:solidFill>
+                  <a:srgbClr val="293136"/>
+                </a:solidFill>
+                <a:latin typeface="Calibri"/>
+              </a:rPr>
+              <a:t>✅ 2024-02 — 2025-12</a:t>
+            </a:r>
+          </a:p>
+        </p:txBody>
+      </p:sp>
+      <p:sp>
+        <p:nvSpPr>
+          <p:cNvPr id="40" name="Rectangle 39"/>
           <p:cNvSpPr/>
           <p:nvPr/>
         </p:nvSpPr>
@@ -17704,7 +21130,7 @@
       </p:sp>
       <p:sp>
         <p:nvSpPr>
-          <p:cNvPr id="18" name="TextBox 17"/>
+          <p:cNvPr id="41" name="TextBox 40"/>
           <p:cNvSpPr txBox="1"/>
           <p:nvPr/>
         </p:nvSpPr>
@@ -17746,6 +21172,751 @@
 </file>
 
 <file path=ppt/slides/slide18.xml><?xml version="1.0" encoding="utf-8"?>
+<p:sld xmlns:a="http://schemas.openxmlformats.org/drawingml/2006/main" xmlns:p="http://schemas.openxmlformats.org/presentationml/2006/main" xmlns:r="http://schemas.openxmlformats.org/officeDocument/2006/relationships">
+  <p:cSld>
+    <p:spTree>
+      <p:nvGrpSpPr>
+        <p:cNvPr id="1" name=""/>
+        <p:cNvGrpSpPr/>
+        <p:nvPr/>
+      </p:nvGrpSpPr>
+      <p:grpSpPr/>
+      <p:sp>
+        <p:nvSpPr>
+          <p:cNvPr id="2" name="Rectangle 1"/>
+          <p:cNvSpPr/>
+          <p:nvPr/>
+        </p:nvSpPr>
+        <p:spPr>
+          <a:xfrm>
+            <a:off x="0" y="0"/>
+            <a:ext cx="12191695" cy="6858000"/>
+          </a:xfrm>
+          <a:prstGeom prst="rect">
+            <a:avLst/>
+          </a:prstGeom>
+          <a:solidFill>
+            <a:srgbClr val="F5F5F5"/>
+          </a:solidFill>
+          <a:ln>
+            <a:noFill/>
+          </a:ln>
+          <a:effectLst/>
+        </p:spPr>
+        <p:style>
+          <a:lnRef idx="1">
+            <a:schemeClr val="accent1"/>
+          </a:lnRef>
+          <a:fillRef idx="3">
+            <a:schemeClr val="accent1"/>
+          </a:fillRef>
+          <a:effectRef idx="2">
+            <a:schemeClr val="accent1"/>
+          </a:effectRef>
+          <a:fontRef idx="minor">
+            <a:schemeClr val="lt1"/>
+          </a:fontRef>
+        </p:style>
+        <p:txBody>
+          <a:bodyPr rtlCol="0" anchor="ctr"/>
+          <a:lstStyle/>
+          <a:p>
+            <a:pPr algn="ctr"/>
+          </a:p>
+        </p:txBody>
+      </p:sp>
+      <p:sp>
+        <p:nvSpPr>
+          <p:cNvPr id="3" name="Rectangle 2"/>
+          <p:cNvSpPr/>
+          <p:nvPr/>
+        </p:nvSpPr>
+        <p:spPr>
+          <a:xfrm>
+            <a:off x="0" y="0"/>
+            <a:ext cx="12191695" cy="1051560"/>
+          </a:xfrm>
+          <a:prstGeom prst="rect">
+            <a:avLst/>
+          </a:prstGeom>
+          <a:solidFill>
+            <a:srgbClr val="FFFFFF"/>
+          </a:solidFill>
+          <a:ln>
+            <a:noFill/>
+          </a:ln>
+          <a:effectLst/>
+        </p:spPr>
+        <p:style>
+          <a:lnRef idx="1">
+            <a:schemeClr val="accent1"/>
+          </a:lnRef>
+          <a:fillRef idx="3">
+            <a:schemeClr val="accent1"/>
+          </a:fillRef>
+          <a:effectRef idx="2">
+            <a:schemeClr val="accent1"/>
+          </a:effectRef>
+          <a:fontRef idx="minor">
+            <a:schemeClr val="lt1"/>
+          </a:fontRef>
+        </p:style>
+        <p:txBody>
+          <a:bodyPr rtlCol="0" anchor="ctr"/>
+          <a:lstStyle/>
+          <a:p>
+            <a:pPr algn="ctr"/>
+          </a:p>
+        </p:txBody>
+      </p:sp>
+      <p:sp>
+        <p:nvSpPr>
+          <p:cNvPr id="4" name="Rectangle 3"/>
+          <p:cNvSpPr/>
+          <p:nvPr/>
+        </p:nvSpPr>
+        <p:spPr>
+          <a:xfrm>
+            <a:off x="0" y="1051560"/>
+            <a:ext cx="12191695" cy="54864"/>
+          </a:xfrm>
+          <a:prstGeom prst="rect">
+            <a:avLst/>
+          </a:prstGeom>
+          <a:solidFill>
+            <a:srgbClr val="3EF0AF"/>
+          </a:solidFill>
+          <a:ln>
+            <a:noFill/>
+          </a:ln>
+          <a:effectLst/>
+        </p:spPr>
+        <p:style>
+          <a:lnRef idx="1">
+            <a:schemeClr val="accent1"/>
+          </a:lnRef>
+          <a:fillRef idx="3">
+            <a:schemeClr val="accent1"/>
+          </a:fillRef>
+          <a:effectRef idx="2">
+            <a:schemeClr val="accent1"/>
+          </a:effectRef>
+          <a:fontRef idx="minor">
+            <a:schemeClr val="lt1"/>
+          </a:fontRef>
+        </p:style>
+        <p:txBody>
+          <a:bodyPr rtlCol="0" anchor="ctr"/>
+          <a:lstStyle/>
+          <a:p>
+            <a:pPr algn="ctr"/>
+          </a:p>
+        </p:txBody>
+      </p:sp>
+      <p:sp>
+        <p:nvSpPr>
+          <p:cNvPr id="5" name="Rectangle 4"/>
+          <p:cNvSpPr/>
+          <p:nvPr/>
+        </p:nvSpPr>
+        <p:spPr>
+          <a:xfrm>
+            <a:off x="0" y="0"/>
+            <a:ext cx="201168" cy="1051560"/>
+          </a:xfrm>
+          <a:prstGeom prst="rect">
+            <a:avLst/>
+          </a:prstGeom>
+          <a:solidFill>
+            <a:srgbClr val="3EF0AF"/>
+          </a:solidFill>
+          <a:ln>
+            <a:noFill/>
+          </a:ln>
+          <a:effectLst/>
+        </p:spPr>
+        <p:style>
+          <a:lnRef idx="1">
+            <a:schemeClr val="accent1"/>
+          </a:lnRef>
+          <a:fillRef idx="3">
+            <a:schemeClr val="accent1"/>
+          </a:fillRef>
+          <a:effectRef idx="2">
+            <a:schemeClr val="accent1"/>
+          </a:effectRef>
+          <a:fontRef idx="minor">
+            <a:schemeClr val="lt1"/>
+          </a:fontRef>
+        </p:style>
+        <p:txBody>
+          <a:bodyPr rtlCol="0" anchor="ctr"/>
+          <a:lstStyle/>
+          <a:p>
+            <a:pPr algn="ctr"/>
+          </a:p>
+        </p:txBody>
+      </p:sp>
+      <p:sp>
+        <p:nvSpPr>
+          <p:cNvPr id="6" name="TextBox 5"/>
+          <p:cNvSpPr txBox="1"/>
+          <p:nvPr/>
+        </p:nvSpPr>
+        <p:spPr>
+          <a:xfrm>
+            <a:off x="457200" y="164592"/>
+            <a:ext cx="10972800" cy="274320"/>
+          </a:xfrm>
+          <a:prstGeom prst="rect">
+            <a:avLst/>
+          </a:prstGeom>
+          <a:noFill/>
+        </p:spPr>
+        <p:txBody>
+          <a:bodyPr wrap="square" anchor="t">
+            <a:spAutoFit/>
+          </a:bodyPr>
+          <a:lstStyle/>
+          <a:p>
+            <a:pPr algn="l"/>
+            <a:r>
+              <a:rPr sz="1100" b="1" i="0">
+                <a:solidFill>
+                  <a:srgbClr val="707880"/>
+                </a:solidFill>
+                <a:latin typeface="Calibri"/>
+              </a:rPr>
+              <a:t>ДЕЙСТВИЯ</a:t>
+            </a:r>
+          </a:p>
+        </p:txBody>
+      </p:sp>
+      <p:sp>
+        <p:nvSpPr>
+          <p:cNvPr id="7" name="TextBox 6"/>
+          <p:cNvSpPr txBox="1"/>
+          <p:nvPr/>
+        </p:nvSpPr>
+        <p:spPr>
+          <a:xfrm>
+            <a:off x="457200" y="411480"/>
+            <a:ext cx="11247120" cy="548640"/>
+          </a:xfrm>
+          <a:prstGeom prst="rect">
+            <a:avLst/>
+          </a:prstGeom>
+          <a:noFill/>
+        </p:spPr>
+        <p:txBody>
+          <a:bodyPr wrap="square" anchor="t">
+            <a:spAutoFit/>
+          </a:bodyPr>
+          <a:lstStyle/>
+          <a:p>
+            <a:pPr algn="l"/>
+            <a:r>
+              <a:rPr sz="2400" b="1" i="0">
+                <a:solidFill>
+                  <a:srgbClr val="293136"/>
+                </a:solidFill>
+                <a:latin typeface="Calibri"/>
+              </a:rPr>
+              <a:t>Рекомендации</a:t>
+            </a:r>
+          </a:p>
+        </p:txBody>
+      </p:sp>
+      <p:sp>
+        <p:nvSpPr>
+          <p:cNvPr id="8" name="Rectangle 7"/>
+          <p:cNvSpPr/>
+          <p:nvPr/>
+        </p:nvSpPr>
+        <p:spPr>
+          <a:xfrm>
+            <a:off x="457200" y="1280160"/>
+            <a:ext cx="2011680" cy="310896"/>
+          </a:xfrm>
+          <a:prstGeom prst="rect">
+            <a:avLst/>
+          </a:prstGeom>
+          <a:solidFill>
+            <a:srgbClr val="E05252"/>
+          </a:solidFill>
+          <a:ln>
+            <a:noFill/>
+          </a:ln>
+          <a:effectLst/>
+        </p:spPr>
+        <p:style>
+          <a:lnRef idx="1">
+            <a:schemeClr val="accent1"/>
+          </a:lnRef>
+          <a:fillRef idx="3">
+            <a:schemeClr val="accent1"/>
+          </a:fillRef>
+          <a:effectRef idx="2">
+            <a:schemeClr val="accent1"/>
+          </a:effectRef>
+          <a:fontRef idx="minor">
+            <a:schemeClr val="lt1"/>
+          </a:fontRef>
+        </p:style>
+        <p:txBody>
+          <a:bodyPr rtlCol="0" anchor="ctr"/>
+          <a:lstStyle/>
+          <a:p>
+            <a:pPr algn="ctr"/>
+          </a:p>
+        </p:txBody>
+      </p:sp>
+      <p:sp>
+        <p:nvSpPr>
+          <p:cNvPr id="9" name="TextBox 8"/>
+          <p:cNvSpPr txBox="1"/>
+          <p:nvPr/>
+        </p:nvSpPr>
+        <p:spPr>
+          <a:xfrm>
+            <a:off x="530352" y="1307592"/>
+            <a:ext cx="1901952" cy="274320"/>
+          </a:xfrm>
+          <a:prstGeom prst="rect">
+            <a:avLst/>
+          </a:prstGeom>
+          <a:noFill/>
+        </p:spPr>
+        <p:txBody>
+          <a:bodyPr wrap="square" anchor="t">
+            <a:spAutoFit/>
+          </a:bodyPr>
+          <a:lstStyle/>
+          <a:p>
+            <a:pPr algn="l"/>
+            <a:r>
+              <a:rPr sz="1100" b="1" i="0">
+                <a:solidFill>
+                  <a:srgbClr val="FFFFFF"/>
+                </a:solidFill>
+                <a:latin typeface="Calibri"/>
+              </a:rPr>
+              <a:t>НЕМЕДЛЕННО</a:t>
+            </a:r>
+          </a:p>
+        </p:txBody>
+      </p:sp>
+      <p:sp>
+        <p:nvSpPr>
+          <p:cNvPr id="10" name="TextBox 9"/>
+          <p:cNvSpPr txBox="1"/>
+          <p:nvPr/>
+        </p:nvSpPr>
+        <p:spPr>
+          <a:xfrm>
+            <a:off x="457200" y="1691640"/>
+            <a:ext cx="11247120" cy="1371600"/>
+          </a:xfrm>
+          <a:prstGeom prst="rect">
+            <a:avLst/>
+          </a:prstGeom>
+          <a:noFill/>
+        </p:spPr>
+        <p:txBody>
+          <a:bodyPr wrap="square" anchor="t">
+            <a:spAutoFit/>
+          </a:bodyPr>
+          <a:lstStyle/>
+          <a:p>
+            <a:pPr algn="l"/>
+            <a:r>
+              <a:rPr sz="1300" b="0" i="0">
+                <a:solidFill>
+                  <a:srgbClr val="293136"/>
+                </a:solidFill>
+                <a:latin typeface="Calibri"/>
+              </a:rPr>
+              <a:t>• Перекалибровать ЭБУ NTE200 под профиль 730E: TIB 100%, включить защиту по T масла и триггеры перегрева, убрать задержки derate, снизить max обороты до 1990.</a:t>
+            </a:r>
+          </a:p>
+          <a:p>
+            <a:pPr algn="l"/>
+            <a:r>
+              <a:rPr sz="1300" b="0" i="0">
+                <a:solidFill>
+                  <a:srgbClr val="293136"/>
+                </a:solidFill>
+                <a:latin typeface="Calibri"/>
+              </a:rPr>
+              <a:t>• Контрольный DML после перекалибровки — подтвердить снижение EGT.</a:t>
+            </a:r>
+          </a:p>
+          <a:p>
+            <a:pPr algn="l"/>
+            <a:r>
+              <a:rPr sz="1300" b="0" i="0">
+                <a:solidFill>
+                  <a:srgbClr val="293136"/>
+                </a:solidFill>
+                <a:latin typeface="Calibri"/>
+              </a:rPr>
+              <a:t>• Заменить датчики EGT с FC1531/1619 (#82, #67).</a:t>
+            </a:r>
+          </a:p>
+        </p:txBody>
+      </p:sp>
+      <p:sp>
+        <p:nvSpPr>
+          <p:cNvPr id="11" name="Rectangle 10"/>
+          <p:cNvSpPr/>
+          <p:nvPr/>
+        </p:nvSpPr>
+        <p:spPr>
+          <a:xfrm>
+            <a:off x="457200" y="3200400"/>
+            <a:ext cx="2377440" cy="310896"/>
+          </a:xfrm>
+          <a:prstGeom prst="rect">
+            <a:avLst/>
+          </a:prstGeom>
+          <a:solidFill>
+            <a:srgbClr val="E08C2E"/>
+          </a:solidFill>
+          <a:ln>
+            <a:noFill/>
+          </a:ln>
+          <a:effectLst/>
+        </p:spPr>
+        <p:style>
+          <a:lnRef idx="1">
+            <a:schemeClr val="accent1"/>
+          </a:lnRef>
+          <a:fillRef idx="3">
+            <a:schemeClr val="accent1"/>
+          </a:fillRef>
+          <a:effectRef idx="2">
+            <a:schemeClr val="accent1"/>
+          </a:effectRef>
+          <a:fontRef idx="minor">
+            <a:schemeClr val="lt1"/>
+          </a:fontRef>
+        </p:style>
+        <p:txBody>
+          <a:bodyPr rtlCol="0" anchor="ctr"/>
+          <a:lstStyle/>
+          <a:p>
+            <a:pPr algn="ctr"/>
+          </a:p>
+        </p:txBody>
+      </p:sp>
+      <p:sp>
+        <p:nvSpPr>
+          <p:cNvPr id="12" name="TextBox 11"/>
+          <p:cNvSpPr txBox="1"/>
+          <p:nvPr/>
+        </p:nvSpPr>
+        <p:spPr>
+          <a:xfrm>
+            <a:off x="530352" y="3227832"/>
+            <a:ext cx="2267712" cy="274320"/>
+          </a:xfrm>
+          <a:prstGeom prst="rect">
+            <a:avLst/>
+          </a:prstGeom>
+          <a:noFill/>
+        </p:spPr>
+        <p:txBody>
+          <a:bodyPr wrap="square" anchor="t">
+            <a:spAutoFit/>
+          </a:bodyPr>
+          <a:lstStyle/>
+          <a:p>
+            <a:pPr algn="l"/>
+            <a:r>
+              <a:rPr sz="1100" b="1" i="0">
+                <a:solidFill>
+                  <a:srgbClr val="FFFFFF"/>
+                </a:solidFill>
+                <a:latin typeface="Calibri"/>
+              </a:rPr>
+              <a:t>СРЕДНЕСРОЧНО</a:t>
+            </a:r>
+          </a:p>
+        </p:txBody>
+      </p:sp>
+      <p:sp>
+        <p:nvSpPr>
+          <p:cNvPr id="13" name="TextBox 12"/>
+          <p:cNvSpPr txBox="1"/>
+          <p:nvPr/>
+        </p:nvSpPr>
+        <p:spPr>
+          <a:xfrm>
+            <a:off x="457200" y="3611880"/>
+            <a:ext cx="11247120" cy="1188720"/>
+          </a:xfrm>
+          <a:prstGeom prst="rect">
+            <a:avLst/>
+          </a:prstGeom>
+          <a:noFill/>
+        </p:spPr>
+        <p:txBody>
+          <a:bodyPr wrap="square" anchor="t">
+            <a:spAutoFit/>
+          </a:bodyPr>
+          <a:lstStyle/>
+          <a:p>
+            <a:pPr algn="l"/>
+            <a:r>
+              <a:rPr sz="1300" b="0" i="0">
+                <a:solidFill>
+                  <a:srgbClr val="293136"/>
+                </a:solidFill>
+                <a:latin typeface="Calibri"/>
+              </a:rPr>
+              <a:t>• Запрос NHL/Cummins: обоснование исключения Stellite и отключения защит; поставка клапанов с наплавкой.</a:t>
+            </a:r>
+          </a:p>
+          <a:p>
+            <a:pPr algn="l"/>
+            <a:r>
+              <a:rPr sz="1300" b="0" i="0">
+                <a:solidFill>
+                  <a:srgbClr val="293136"/>
+                </a:solidFill>
+                <a:latin typeface="Calibri"/>
+              </a:rPr>
+              <a:t>• Унифицировать прошивку ЭБУ (.07/.08).</a:t>
+            </a:r>
+          </a:p>
+          <a:p>
+            <a:pPr algn="l"/>
+            <a:r>
+              <a:rPr sz="1300" b="0" i="0">
+                <a:solidFill>
+                  <a:srgbClr val="293136"/>
+                </a:solidFill>
+                <a:latin typeface="Calibri"/>
+              </a:rPr>
+              <a:t>• Сопоставить FC611/EGT-коды с историей ремонтов.</a:t>
+            </a:r>
+          </a:p>
+        </p:txBody>
+      </p:sp>
+      <p:sp>
+        <p:nvSpPr>
+          <p:cNvPr id="14" name="Rectangle 13"/>
+          <p:cNvSpPr/>
+          <p:nvPr/>
+        </p:nvSpPr>
+        <p:spPr>
+          <a:xfrm>
+            <a:off x="457200" y="4846320"/>
+            <a:ext cx="2194560" cy="310896"/>
+          </a:xfrm>
+          <a:prstGeom prst="rect">
+            <a:avLst/>
+          </a:prstGeom>
+          <a:solidFill>
+            <a:srgbClr val="2EA043"/>
+          </a:solidFill>
+          <a:ln>
+            <a:noFill/>
+          </a:ln>
+          <a:effectLst/>
+        </p:spPr>
+        <p:style>
+          <a:lnRef idx="1">
+            <a:schemeClr val="accent1"/>
+          </a:lnRef>
+          <a:fillRef idx="3">
+            <a:schemeClr val="accent1"/>
+          </a:fillRef>
+          <a:effectRef idx="2">
+            <a:schemeClr val="accent1"/>
+          </a:effectRef>
+          <a:fontRef idx="minor">
+            <a:schemeClr val="lt1"/>
+          </a:fontRef>
+        </p:style>
+        <p:txBody>
+          <a:bodyPr rtlCol="0" anchor="ctr"/>
+          <a:lstStyle/>
+          <a:p>
+            <a:pPr algn="ctr"/>
+          </a:p>
+        </p:txBody>
+      </p:sp>
+      <p:sp>
+        <p:nvSpPr>
+          <p:cNvPr id="15" name="TextBox 14"/>
+          <p:cNvSpPr txBox="1"/>
+          <p:nvPr/>
+        </p:nvSpPr>
+        <p:spPr>
+          <a:xfrm>
+            <a:off x="530352" y="4873752"/>
+            <a:ext cx="2084831" cy="274320"/>
+          </a:xfrm>
+          <a:prstGeom prst="rect">
+            <a:avLst/>
+          </a:prstGeom>
+          <a:noFill/>
+        </p:spPr>
+        <p:txBody>
+          <a:bodyPr wrap="square" anchor="t">
+            <a:spAutoFit/>
+          </a:bodyPr>
+          <a:lstStyle/>
+          <a:p>
+            <a:pPr algn="l"/>
+            <a:r>
+              <a:rPr sz="1100" b="1" i="0">
+                <a:solidFill>
+                  <a:srgbClr val="FFFFFF"/>
+                </a:solidFill>
+                <a:latin typeface="Calibri"/>
+              </a:rPr>
+              <a:t>ДОЛГОСРОЧНО</a:t>
+            </a:r>
+          </a:p>
+        </p:txBody>
+      </p:sp>
+      <p:sp>
+        <p:nvSpPr>
+          <p:cNvPr id="16" name="TextBox 15"/>
+          <p:cNvSpPr txBox="1"/>
+          <p:nvPr/>
+        </p:nvSpPr>
+        <p:spPr>
+          <a:xfrm>
+            <a:off x="457200" y="5257800"/>
+            <a:ext cx="11247120" cy="914400"/>
+          </a:xfrm>
+          <a:prstGeom prst="rect">
+            <a:avLst/>
+          </a:prstGeom>
+          <a:noFill/>
+        </p:spPr>
+        <p:txBody>
+          <a:bodyPr wrap="square" anchor="t">
+            <a:spAutoFit/>
+          </a:bodyPr>
+          <a:lstStyle/>
+          <a:p>
+            <a:pPr algn="l"/>
+            <a:r>
+              <a:rPr sz="1300" b="0" i="0">
+                <a:solidFill>
+                  <a:srgbClr val="293136"/>
+                </a:solidFill>
+                <a:latin typeface="Calibri"/>
+              </a:rPr>
+              <a:t>• Мониторинг EGT и FC611 в реальном времени.</a:t>
+            </a:r>
+          </a:p>
+          <a:p>
+            <a:pPr algn="l"/>
+            <a:r>
+              <a:rPr sz="1300" b="0" i="0">
+                <a:solidFill>
+                  <a:srgbClr val="293136"/>
+                </a:solidFill>
+                <a:latin typeface="Calibri"/>
+              </a:rPr>
+              <a:t>• Устранить нарушение по паспорту топлива №246.</a:t>
+            </a:r>
+          </a:p>
+        </p:txBody>
+      </p:sp>
+      <p:sp>
+        <p:nvSpPr>
+          <p:cNvPr id="17" name="Rectangle 16"/>
+          <p:cNvSpPr/>
+          <p:nvPr/>
+        </p:nvSpPr>
+        <p:spPr>
+          <a:xfrm>
+            <a:off x="0" y="6510528"/>
+            <a:ext cx="12191695" cy="347472"/>
+          </a:xfrm>
+          <a:prstGeom prst="rect">
+            <a:avLst/>
+          </a:prstGeom>
+          <a:solidFill>
+            <a:srgbClr val="293136"/>
+          </a:solidFill>
+          <a:ln>
+            <a:noFill/>
+          </a:ln>
+          <a:effectLst/>
+        </p:spPr>
+        <p:style>
+          <a:lnRef idx="1">
+            <a:schemeClr val="accent1"/>
+          </a:lnRef>
+          <a:fillRef idx="3">
+            <a:schemeClr val="accent1"/>
+          </a:fillRef>
+          <a:effectRef idx="2">
+            <a:schemeClr val="accent1"/>
+          </a:effectRef>
+          <a:fontRef idx="minor">
+            <a:schemeClr val="lt1"/>
+          </a:fontRef>
+        </p:style>
+        <p:txBody>
+          <a:bodyPr rtlCol="0" anchor="ctr"/>
+          <a:lstStyle/>
+          <a:p>
+            <a:pPr algn="ctr"/>
+          </a:p>
+        </p:txBody>
+      </p:sp>
+      <p:sp>
+        <p:nvSpPr>
+          <p:cNvPr id="18" name="TextBox 17"/>
+          <p:cNvSpPr txBox="1"/>
+          <p:nvPr/>
+        </p:nvSpPr>
+        <p:spPr>
+          <a:xfrm>
+            <a:off x="365760" y="6547104"/>
+            <a:ext cx="11430000" cy="274320"/>
+          </a:xfrm>
+          <a:prstGeom prst="rect">
+            <a:avLst/>
+          </a:prstGeom>
+          <a:noFill/>
+        </p:spPr>
+        <p:txBody>
+          <a:bodyPr wrap="square" anchor="t">
+            <a:spAutoFit/>
+          </a:bodyPr>
+          <a:lstStyle/>
+          <a:p>
+            <a:pPr algn="l"/>
+            <a:r>
+              <a:rPr sz="900" b="0" i="0">
+                <a:solidFill>
+                  <a:srgbClr val="CFD6DA"/>
+                </a:solidFill>
+                <a:latin typeface="Calibri"/>
+              </a:rPr>
+              <a:t>АО Развитие   •   QSK50 / NTE200   •   Полюс Магадан   •   2026   •   Конфиденциально</a:t>
+            </a:r>
+          </a:p>
+        </p:txBody>
+      </p:sp>
+    </p:spTree>
+  </p:cSld>
+  <p:clrMapOvr>
+    <a:masterClrMapping/>
+  </p:clrMapOvr>
+</p:sld>
+</file>
+
+<file path=ppt/slides/slide19.xml><?xml version="1.0" encoding="utf-8"?>
 <p:sld xmlns:a="http://schemas.openxmlformats.org/drawingml/2006/main" xmlns:p="http://schemas.openxmlformats.org/presentationml/2006/main" xmlns:r="http://schemas.openxmlformats.org/officeDocument/2006/relationships">
   <p:cSld>
     <p:spTree>
